--- a/PID_Workshop_V1.pptx
+++ b/PID_Workshop_V1.pptx
@@ -741,7 +741,7 @@
           <a:p>
             <a:fld id="{FDEC54B6-3A06-4A98-8DD7-91AC2EA515D9}" type="datetimeFigureOut">
               <a:rPr lang="en-US" smtClean="0"/>
-              <a:t>4/28/2026</a:t>
+              <a:t>5/1/2026</a:t>
             </a:fld>
             <a:endParaRPr lang="en-US" dirty="0"/>
           </a:p>
@@ -5462,8 +5462,8 @@
           </a:p>
         </p:txBody>
       </p:sp>
-      <mc:AlternateContent xmlns:mc="http://schemas.openxmlformats.org/markup-compatibility/2006">
-        <mc:Choice xmlns:a14="http://schemas.microsoft.com/office/drawing/2010/main" Requires="a14">
+      <mc:AlternateContent xmlns:mc="http://schemas.openxmlformats.org/markup-compatibility/2006" xmlns:a14="http://schemas.microsoft.com/office/drawing/2010/main">
+        <mc:Choice Requires="a14">
           <p:sp>
             <p:nvSpPr>
               <p:cNvPr id="7" name="Content Placeholder 2">
@@ -6331,7 +6331,7 @@
             </p:txBody>
           </p:sp>
         </mc:Choice>
-        <mc:Fallback>
+        <mc:Fallback xmlns="">
           <p:sp>
             <p:nvSpPr>
               <p:cNvPr id="7" name="Content Placeholder 2">
@@ -8942,7 +8942,7 @@
               <a:rPr lang="en-US" sz="2800" dirty="0"/>
               <a:t>Intro to PID</a:t>
             </a:r>
-            <a:endParaRPr lang="en-US" sz="2800">
+            <a:endParaRPr lang="en-US" sz="2800" dirty="0">
               <a:cs typeface="Arial"/>
             </a:endParaRPr>
           </a:p>
@@ -8955,7 +8955,7 @@
               <a:rPr lang="en-US" sz="2800" dirty="0"/>
               <a:t>Manual tuning</a:t>
             </a:r>
-            <a:endParaRPr lang="en-US" sz="2800">
+            <a:endParaRPr lang="en-US" sz="2800" dirty="0">
               <a:cs typeface="Arial"/>
             </a:endParaRPr>
           </a:p>
@@ -8968,7 +8968,7 @@
               <a:rPr lang="en-US" sz="2800" dirty="0"/>
               <a:t>Problems with the D</a:t>
             </a:r>
-            <a:endParaRPr lang="en-US" sz="2800">
+            <a:endParaRPr lang="en-US" sz="2800" dirty="0">
               <a:cs typeface="Arial"/>
             </a:endParaRPr>
           </a:p>
@@ -8994,7 +8994,7 @@
               <a:rPr lang="en-US" sz="2800" dirty="0"/>
               <a:t>Ziegler-Nichols (ZN) tuning</a:t>
             </a:r>
-            <a:endParaRPr lang="en-US" sz="2800">
+            <a:endParaRPr lang="en-US" sz="2800" dirty="0">
               <a:cs typeface="Arial"/>
             </a:endParaRPr>
           </a:p>
@@ -9007,7 +9007,7 @@
               <a:rPr lang="en-US" sz="2800" dirty="0"/>
               <a:t>Gain Scheduling</a:t>
             </a:r>
-            <a:endParaRPr lang="en-US" sz="2800">
+            <a:endParaRPr lang="en-US" sz="2800" dirty="0">
               <a:cs typeface="Arial"/>
             </a:endParaRPr>
           </a:p>
@@ -9027,8 +9027,8 @@
         </p:nvSpPr>
         <p:spPr>
           <a:xfrm>
-            <a:off x="4036594" y="5254290"/>
-            <a:ext cx="7800473" cy="688306"/>
+            <a:off x="5124091" y="5254290"/>
+            <a:ext cx="6712976" cy="688306"/>
           </a:xfrm>
           <a:prstGeom prst="rect">
             <a:avLst/>
@@ -9062,30 +9062,22 @@
           <a:p>
             <a:pPr algn="ctr"/>
             <a:r>
-              <a:rPr lang="en-US" sz="1800" b="1" baseline="0">
+              <a:rPr lang="en-US" sz="1800" b="1" baseline="0" dirty="0">
                 <a:latin typeface="Arial"/>
               </a:rPr>
               <a:t>Link: </a:t>
             </a:r>
             <a:r>
-              <a:rPr lang="en-US" sz="1800" b="1" u="sng" strike="noStrike" baseline="0">
+              <a:rPr lang="en-US" b="1" u="sng" dirty="0">
                 <a:solidFill>
                   <a:srgbClr val="181717"/>
                 </a:solidFill>
-                <a:latin typeface="Arial"/>
                 <a:ea typeface="Segoe UI"/>
                 <a:cs typeface="Segoe UI"/>
-                <a:hlinkClick r:id="rId3">
-                  <a:extLst>
-                    <a:ext uri="{A12FA001-AC4F-418D-AE19-62706E023703}">
-                      <ahyp:hlinkClr xmlns:ahyp="http://schemas.microsoft.com/office/drawing/2018/hyperlinkcolor" val="tx"/>
-                    </a:ext>
-                  </a:extLst>
-                </a:hlinkClick>
               </a:rPr>
-              <a:t>https://github.com/jonaswagner2826/DSC_SysID_Workshop</a:t>
-            </a:r>
-            <a:endParaRPr lang="en-US"/>
+              <a:t>https://github.com/m-usama-z/cssc-pid-workshop</a:t>
+            </a:r>
+            <a:endParaRPr lang="en-US" dirty="0"/>
           </a:p>
         </p:txBody>
       </p:sp>
@@ -9395,8 +9387,8 @@
           </a:p>
         </p:txBody>
       </p:sp>
-      <mc:AlternateContent xmlns:mc="http://schemas.openxmlformats.org/markup-compatibility/2006">
-        <mc:Choice xmlns:a14="http://schemas.microsoft.com/office/drawing/2010/main" Requires="a14">
+      <mc:AlternateContent xmlns:mc="http://schemas.openxmlformats.org/markup-compatibility/2006" xmlns:a14="http://schemas.microsoft.com/office/drawing/2010/main">
+        <mc:Choice Requires="a14">
           <p:sp>
             <p:nvSpPr>
               <p:cNvPr id="7" name="Content Placeholder 2">
@@ -10059,7 +10051,7 @@
             </p:txBody>
           </p:sp>
         </mc:Choice>
-        <mc:Fallback>
+        <mc:Fallback xmlns="">
           <p:sp>
             <p:nvSpPr>
               <p:cNvPr id="7" name="Content Placeholder 2">
@@ -10996,8 +10988,8 @@
           </a:p>
         </p:txBody>
       </p:sp>
-      <mc:AlternateContent xmlns:mc="http://schemas.openxmlformats.org/markup-compatibility/2006">
-        <mc:Choice xmlns:a14="http://schemas.microsoft.com/office/drawing/2010/main" Requires="a14">
+      <mc:AlternateContent xmlns:mc="http://schemas.openxmlformats.org/markup-compatibility/2006" xmlns:a14="http://schemas.microsoft.com/office/drawing/2010/main">
+        <mc:Choice Requires="a14">
           <p:sp>
             <p:nvSpPr>
               <p:cNvPr id="7" name="Content Placeholder 2">
@@ -11417,7 +11409,7 @@
             </p:txBody>
           </p:sp>
         </mc:Choice>
-        <mc:Fallback>
+        <mc:Fallback xmlns="">
           <p:sp>
             <p:nvSpPr>
               <p:cNvPr id="7" name="Content Placeholder 2">
@@ -11633,8 +11625,8 @@
           </a:p>
         </p:txBody>
       </p:sp>
-      <mc:AlternateContent xmlns:mc="http://schemas.openxmlformats.org/markup-compatibility/2006">
-        <mc:Choice xmlns:a14="http://schemas.microsoft.com/office/drawing/2010/main" Requires="a14">
+      <mc:AlternateContent xmlns:mc="http://schemas.openxmlformats.org/markup-compatibility/2006" xmlns:a14="http://schemas.microsoft.com/office/drawing/2010/main">
+        <mc:Choice Requires="a14">
           <p:sp>
             <p:nvSpPr>
               <p:cNvPr id="7" name="Content Placeholder 2">
@@ -12239,7 +12231,7 @@
             </p:txBody>
           </p:sp>
         </mc:Choice>
-        <mc:Fallback>
+        <mc:Fallback xmlns="">
           <p:sp>
             <p:nvSpPr>
               <p:cNvPr id="7" name="Content Placeholder 2">
@@ -13004,18 +12996,18 @@
 </file>
 
 <file path=customXml/item2.xml><?xml version="1.0" encoding="utf-8"?>
+<p:properties xmlns:p="http://schemas.microsoft.com/office/2006/metadata/properties" xmlns:xsi="http://www.w3.org/2001/XMLSchema-instance" xmlns:pc="http://schemas.microsoft.com/office/infopath/2007/PartnerControls">
+  <documentManagement/>
+</p:properties>
+</file>
+
+<file path=customXml/item3.xml><?xml version="1.0" encoding="utf-8"?>
 <?mso-contentType ?>
 <FormTemplates xmlns="http://schemas.microsoft.com/sharepoint/v3/contenttype/forms">
   <Display>DocumentLibraryForm</Display>
   <Edit>DocumentLibraryForm</Edit>
   <New>DocumentLibraryForm</New>
 </FormTemplates>
-</file>
-
-<file path=customXml/item3.xml><?xml version="1.0" encoding="utf-8"?>
-<p:properties xmlns:p="http://schemas.microsoft.com/office/2006/metadata/properties" xmlns:xsi="http://www.w3.org/2001/XMLSchema-instance" xmlns:pc="http://schemas.microsoft.com/office/infopath/2007/PartnerControls">
-  <documentManagement/>
-</p:properties>
 </file>
 
 <file path=customXml/itemProps1.xml><?xml version="1.0" encoding="utf-8"?>
@@ -13038,14 +13030,6 @@
 </file>
 
 <file path=customXml/itemProps2.xml><?xml version="1.0" encoding="utf-8"?>
-<ds:datastoreItem xmlns:ds="http://schemas.openxmlformats.org/officeDocument/2006/customXml" ds:itemID="{6FDC3E2B-2B95-4DEE-BED9-0388B258D0F5}">
-  <ds:schemaRefs>
-    <ds:schemaRef ds:uri="http://schemas.microsoft.com/sharepoint/v3/contenttype/forms"/>
-  </ds:schemaRefs>
-</ds:datastoreItem>
-</file>
-
-<file path=customXml/itemProps3.xml><?xml version="1.0" encoding="utf-8"?>
 <ds:datastoreItem xmlns:ds="http://schemas.openxmlformats.org/officeDocument/2006/customXml" ds:itemID="{D9406880-3DFF-4A78-B374-1310A739C756}">
   <ds:schemaRefs>
     <ds:schemaRef ds:uri="http://schemas.microsoft.com/office/2006/documentManagement/types"/>
@@ -13060,4 +13044,12 @@
     <ds:schemaRef ds:uri="http://www.w3.org/XML/1998/namespace"/>
   </ds:schemaRefs>
 </ds:datastoreItem>
+</file>
+
+<file path=customXml/itemProps3.xml><?xml version="1.0" encoding="utf-8"?>
+<ds:datastoreItem xmlns:ds="http://schemas.openxmlformats.org/officeDocument/2006/customXml" ds:itemID="{6FDC3E2B-2B95-4DEE-BED9-0388B258D0F5}">
+  <ds:schemaRefs>
+    <ds:schemaRef ds:uri="http://schemas.microsoft.com/sharepoint/v3/contenttype/forms"/>
+  </ds:schemaRefs>
+</ds:datastoreItem>
 </file>
--- a/PID_Workshop_V1.pptx
+++ b/PID_Workshop_V1.pptx
@@ -5,7 +5,7 @@
     <p:sldMasterId id="2147483660" r:id="rId4"/>
   </p:sldMasterIdLst>
   <p:notesMasterIdLst>
-    <p:notesMasterId r:id="rId21"/>
+    <p:notesMasterId r:id="rId25"/>
   </p:notesMasterIdLst>
   <p:sldIdLst>
     <p:sldId id="681" r:id="rId5"/>
@@ -17,13 +17,17 @@
     <p:sldId id="703" r:id="rId11"/>
     <p:sldId id="694" r:id="rId12"/>
     <p:sldId id="695" r:id="rId13"/>
-    <p:sldId id="696" r:id="rId14"/>
-    <p:sldId id="697" r:id="rId15"/>
-    <p:sldId id="698" r:id="rId16"/>
-    <p:sldId id="704" r:id="rId17"/>
-    <p:sldId id="699" r:id="rId18"/>
-    <p:sldId id="692" r:id="rId19"/>
-    <p:sldId id="691" r:id="rId20"/>
+    <p:sldId id="698" r:id="rId14"/>
+    <p:sldId id="706" r:id="rId15"/>
+    <p:sldId id="696" r:id="rId16"/>
+    <p:sldId id="705" r:id="rId17"/>
+    <p:sldId id="697" r:id="rId18"/>
+    <p:sldId id="704" r:id="rId19"/>
+    <p:sldId id="708" r:id="rId20"/>
+    <p:sldId id="707" r:id="rId21"/>
+    <p:sldId id="699" r:id="rId22"/>
+    <p:sldId id="692" r:id="rId23"/>
+    <p:sldId id="691" r:id="rId24"/>
   </p:sldIdLst>
   <p:sldSz cx="12192000" cy="6858000"/>
   <p:notesSz cx="6858000" cy="9144000"/>
@@ -136,10 +140,14 @@
             <p14:sldId id="703"/>
             <p14:sldId id="694"/>
             <p14:sldId id="695"/>
+            <p14:sldId id="698"/>
+            <p14:sldId id="706"/>
             <p14:sldId id="696"/>
+            <p14:sldId id="705"/>
             <p14:sldId id="697"/>
-            <p14:sldId id="698"/>
             <p14:sldId id="704"/>
+            <p14:sldId id="708"/>
+            <p14:sldId id="707"/>
             <p14:sldId id="699"/>
             <p14:sldId id="692"/>
             <p14:sldId id="691"/>
@@ -1161,6 +1169,356 @@
         <p:cNvPr id="1" name="">
           <a:extLst>
             <a:ext uri="{FF2B5EF4-FFF2-40B4-BE49-F238E27FC236}">
+              <a16:creationId xmlns:a16="http://schemas.microsoft.com/office/drawing/2014/main" id="{F36EA52A-8E2D-DAC0-5182-F351D19B098D}"/>
+            </a:ext>
+          </a:extLst>
+        </p:cNvPr>
+        <p:cNvGrpSpPr/>
+        <p:nvPr/>
+      </p:nvGrpSpPr>
+      <p:grpSpPr>
+        <a:xfrm>
+          <a:off x="0" y="0"/>
+          <a:ext cx="0" cy="0"/>
+          <a:chOff x="0" y="0"/>
+          <a:chExt cx="0" cy="0"/>
+        </a:xfrm>
+      </p:grpSpPr>
+      <p:sp>
+        <p:nvSpPr>
+          <p:cNvPr id="2" name="Slide Image Placeholder 1">
+            <a:extLst>
+              <a:ext uri="{FF2B5EF4-FFF2-40B4-BE49-F238E27FC236}">
+                <a16:creationId xmlns:a16="http://schemas.microsoft.com/office/drawing/2014/main" id="{48CCE744-3376-889E-1E75-8A39ECCE6E8D}"/>
+              </a:ext>
+            </a:extLst>
+          </p:cNvPr>
+          <p:cNvSpPr>
+            <a:spLocks noGrp="1" noRot="1" noChangeAspect="1"/>
+          </p:cNvSpPr>
+          <p:nvPr>
+            <p:ph type="sldImg"/>
+          </p:nvPr>
+        </p:nvSpPr>
+        <p:spPr/>
+      </p:sp>
+      <p:sp>
+        <p:nvSpPr>
+          <p:cNvPr id="3" name="Notes Placeholder 2">
+            <a:extLst>
+              <a:ext uri="{FF2B5EF4-FFF2-40B4-BE49-F238E27FC236}">
+                <a16:creationId xmlns:a16="http://schemas.microsoft.com/office/drawing/2014/main" id="{54A1FB78-332D-BE46-2DCC-6005FAF71894}"/>
+              </a:ext>
+            </a:extLst>
+          </p:cNvPr>
+          <p:cNvSpPr>
+            <a:spLocks noGrp="1"/>
+          </p:cNvSpPr>
+          <p:nvPr>
+            <p:ph type="body" idx="1"/>
+          </p:nvPr>
+        </p:nvSpPr>
+        <p:spPr/>
+        <p:txBody>
+          <a:bodyPr/>
+          <a:lstStyle/>
+          <a:p>
+            <a:r>
+              <a:rPr lang="en-US" dirty="0"/>
+              <a:t>Integral windup appears when the actuator hits a limit, such as maximum voltage, valve position, or duty cycle. The controller output cannot increase further, but the integrator may keep accumulating error as if more authority were available. When the loop finally leaves saturation, that stored integral action causes sluggish recovery or large overshoot. Anti-windup methods try to stop that buildup. The simplest approach is clamping, where the integrator is paused or limited when the output is saturated in the wrong direction. A more systematic method is back-calculation, which feeds the difference between the unsaturated and saturated outputs back into the integrator state.</a:t>
+            </a:r>
+            <a:br>
+              <a:rPr lang="en-US" dirty="0">
+                <a:cs typeface="+mn-lt"/>
+              </a:rPr>
+            </a:br>
+            <a:br>
+              <a:rPr lang="en-US" dirty="0">
+                <a:cs typeface="+mn-lt"/>
+              </a:rPr>
+            </a:br>
+            <a:r>
+              <a:rPr lang="en-US" dirty="0"/>
+              <a:t>[Sources]</a:t>
+            </a:r>
+            <a:br>
+              <a:rPr lang="en-US" dirty="0">
+                <a:cs typeface="+mn-lt"/>
+              </a:rPr>
+            </a:br>
+            <a:r>
+              <a:rPr lang="en-US" dirty="0"/>
+              <a:t>MathWorks Simulink PID Controller documentation: derivative filtering, output saturation, anti-windup, and controller structure.</a:t>
+            </a:r>
+            <a:br>
+              <a:rPr lang="en-US" dirty="0">
+                <a:cs typeface="+mn-lt"/>
+              </a:rPr>
+            </a:br>
+            <a:r>
+              <a:rPr lang="en-US" dirty="0"/>
+              <a:t>Caltech FBS Wiki PID Control chapter: PID roles, integrator windup, and tuning overview.</a:t>
+            </a:r>
+            <a:br>
+              <a:rPr lang="en-US" dirty="0">
+                <a:cs typeface="+mn-lt"/>
+              </a:rPr>
+            </a:br>
+            <a:r>
+              <a:rPr lang="en-US" dirty="0"/>
+              <a:t>Engineering </a:t>
+            </a:r>
+            <a:r>
+              <a:rPr lang="en-US" dirty="0" err="1"/>
+              <a:t>LibreTexts</a:t>
+            </a:r>
+            <a:r>
+              <a:rPr lang="en-US" dirty="0"/>
+              <a:t> PID tuning via classical methods: Ziegler-Nichols experimental tuning concepts.</a:t>
+            </a:r>
+            <a:br>
+              <a:rPr lang="en-US" dirty="0">
+                <a:cs typeface="+mn-lt"/>
+              </a:rPr>
+            </a:br>
+            <a:r>
+              <a:rPr lang="en-US" dirty="0"/>
+              <a:t>Wikipedia: PID controller and Ziegler-Nichols method for standard definitions and classic formulas.</a:t>
+            </a:r>
+          </a:p>
+          <a:p>
+            <a:endParaRPr lang="en-US" dirty="0">
+              <a:ea typeface="Calibri"/>
+              <a:cs typeface="Calibri"/>
+            </a:endParaRPr>
+          </a:p>
+        </p:txBody>
+      </p:sp>
+      <p:sp>
+        <p:nvSpPr>
+          <p:cNvPr id="4" name="Slide Number Placeholder 3">
+            <a:extLst>
+              <a:ext uri="{FF2B5EF4-FFF2-40B4-BE49-F238E27FC236}">
+                <a16:creationId xmlns:a16="http://schemas.microsoft.com/office/drawing/2014/main" id="{98E7C33C-B65E-9E09-16CD-24D0755C6829}"/>
+              </a:ext>
+            </a:extLst>
+          </p:cNvPr>
+          <p:cNvSpPr>
+            <a:spLocks noGrp="1"/>
+          </p:cNvSpPr>
+          <p:nvPr>
+            <p:ph type="sldNum" sz="quarter" idx="5"/>
+          </p:nvPr>
+        </p:nvSpPr>
+        <p:spPr/>
+        <p:txBody>
+          <a:bodyPr/>
+          <a:lstStyle/>
+          <a:p>
+            <a:fld id="{C149EEB9-1E5D-4336-B1B3-152F63E4D131}" type="slidenum">
+              <a:rPr lang="en-US" smtClean="0"/>
+              <a:t>13</a:t>
+            </a:fld>
+            <a:endParaRPr lang="en-US" dirty="0"/>
+          </a:p>
+        </p:txBody>
+      </p:sp>
+    </p:spTree>
+    <p:extLst>
+      <p:ext uri="{BB962C8B-B14F-4D97-AF65-F5344CB8AC3E}">
+        <p14:creationId xmlns:p14="http://schemas.microsoft.com/office/powerpoint/2010/main" val="1485409396"/>
+      </p:ext>
+    </p:extLst>
+  </p:cSld>
+  <p:clrMapOvr>
+    <a:masterClrMapping/>
+  </p:clrMapOvr>
+</p:notes>
+</file>
+
+<file path=ppt/notesSlides/notesSlide11.xml><?xml version="1.0" encoding="utf-8"?>
+<p:notes xmlns:a="http://schemas.openxmlformats.org/drawingml/2006/main" xmlns:r="http://schemas.openxmlformats.org/officeDocument/2006/relationships" xmlns:p="http://schemas.openxmlformats.org/presentationml/2006/main">
+  <p:cSld>
+    <p:spTree>
+      <p:nvGrpSpPr>
+        <p:cNvPr id="1" name="">
+          <a:extLst>
+            <a:ext uri="{FF2B5EF4-FFF2-40B4-BE49-F238E27FC236}">
+              <a16:creationId xmlns:a16="http://schemas.microsoft.com/office/drawing/2014/main" id="{D8145B60-1E27-D5AC-4FDB-72599364DB0E}"/>
+            </a:ext>
+          </a:extLst>
+        </p:cNvPr>
+        <p:cNvGrpSpPr/>
+        <p:nvPr/>
+      </p:nvGrpSpPr>
+      <p:grpSpPr>
+        <a:xfrm>
+          <a:off x="0" y="0"/>
+          <a:ext cx="0" cy="0"/>
+          <a:chOff x="0" y="0"/>
+          <a:chExt cx="0" cy="0"/>
+        </a:xfrm>
+      </p:grpSpPr>
+      <p:sp>
+        <p:nvSpPr>
+          <p:cNvPr id="2" name="Slide Image Placeholder 1">
+            <a:extLst>
+              <a:ext uri="{FF2B5EF4-FFF2-40B4-BE49-F238E27FC236}">
+                <a16:creationId xmlns:a16="http://schemas.microsoft.com/office/drawing/2014/main" id="{AC6B062A-DCAF-4905-0728-3956060B27AB}"/>
+              </a:ext>
+            </a:extLst>
+          </p:cNvPr>
+          <p:cNvSpPr>
+            <a:spLocks noGrp="1" noRot="1" noChangeAspect="1"/>
+          </p:cNvSpPr>
+          <p:nvPr>
+            <p:ph type="sldImg"/>
+          </p:nvPr>
+        </p:nvSpPr>
+        <p:spPr/>
+      </p:sp>
+      <p:sp>
+        <p:nvSpPr>
+          <p:cNvPr id="3" name="Notes Placeholder 2">
+            <a:extLst>
+              <a:ext uri="{FF2B5EF4-FFF2-40B4-BE49-F238E27FC236}">
+                <a16:creationId xmlns:a16="http://schemas.microsoft.com/office/drawing/2014/main" id="{D9DB388B-26C2-AD91-EC8D-EBD86B1092D8}"/>
+              </a:ext>
+            </a:extLst>
+          </p:cNvPr>
+          <p:cNvSpPr>
+            <a:spLocks noGrp="1"/>
+          </p:cNvSpPr>
+          <p:nvPr>
+            <p:ph type="body" idx="1"/>
+          </p:nvPr>
+        </p:nvSpPr>
+        <p:spPr/>
+        <p:txBody>
+          <a:bodyPr/>
+          <a:lstStyle/>
+          <a:p>
+            <a:r>
+              <a:rPr lang="en-US" dirty="0"/>
+              <a:t>A more systematic method is back-calculation, which feeds the difference between the unsaturated and saturated outputs back into the integrator state.</a:t>
+            </a:r>
+            <a:br>
+              <a:rPr lang="en-US" dirty="0">
+                <a:cs typeface="+mn-lt"/>
+              </a:rPr>
+            </a:br>
+            <a:br>
+              <a:rPr lang="en-US" dirty="0">
+                <a:cs typeface="+mn-lt"/>
+              </a:rPr>
+            </a:br>
+            <a:r>
+              <a:rPr lang="en-US" dirty="0"/>
+              <a:t>[Sources]</a:t>
+            </a:r>
+            <a:br>
+              <a:rPr lang="en-US" dirty="0">
+                <a:cs typeface="+mn-lt"/>
+              </a:rPr>
+            </a:br>
+            <a:r>
+              <a:rPr lang="en-US" dirty="0"/>
+              <a:t>MathWorks Simulink PID Controller documentation: derivative filtering, output saturation, anti-windup, and controller structure.</a:t>
+            </a:r>
+            <a:br>
+              <a:rPr lang="en-US" dirty="0">
+                <a:cs typeface="+mn-lt"/>
+              </a:rPr>
+            </a:br>
+            <a:r>
+              <a:rPr lang="en-US" dirty="0"/>
+              <a:t>Caltech FBS Wiki PID Control chapter: PID roles, integrator windup, and tuning overview.</a:t>
+            </a:r>
+            <a:br>
+              <a:rPr lang="en-US" dirty="0">
+                <a:cs typeface="+mn-lt"/>
+              </a:rPr>
+            </a:br>
+            <a:r>
+              <a:rPr lang="en-US" dirty="0"/>
+              <a:t>Engineering </a:t>
+            </a:r>
+            <a:r>
+              <a:rPr lang="en-US" dirty="0" err="1"/>
+              <a:t>LibreTexts</a:t>
+            </a:r>
+            <a:r>
+              <a:rPr lang="en-US" dirty="0"/>
+              <a:t> PID tuning via classical methods: Ziegler-Nichols experimental tuning concepts.</a:t>
+            </a:r>
+            <a:br>
+              <a:rPr lang="en-US" dirty="0">
+                <a:cs typeface="+mn-lt"/>
+              </a:rPr>
+            </a:br>
+            <a:r>
+              <a:rPr lang="en-US" dirty="0"/>
+              <a:t>Wikipedia: PID controller and Ziegler-Nichols method for standard definitions and classic formulas.</a:t>
+            </a:r>
+          </a:p>
+          <a:p>
+            <a:endParaRPr lang="en-US" dirty="0">
+              <a:ea typeface="Calibri"/>
+              <a:cs typeface="Calibri"/>
+            </a:endParaRPr>
+          </a:p>
+        </p:txBody>
+      </p:sp>
+      <p:sp>
+        <p:nvSpPr>
+          <p:cNvPr id="4" name="Slide Number Placeholder 3">
+            <a:extLst>
+              <a:ext uri="{FF2B5EF4-FFF2-40B4-BE49-F238E27FC236}">
+                <a16:creationId xmlns:a16="http://schemas.microsoft.com/office/drawing/2014/main" id="{03EC3CD4-88B1-442A-4917-A9C9A8134D85}"/>
+              </a:ext>
+            </a:extLst>
+          </p:cNvPr>
+          <p:cNvSpPr>
+            <a:spLocks noGrp="1"/>
+          </p:cNvSpPr>
+          <p:nvPr>
+            <p:ph type="sldNum" sz="quarter" idx="5"/>
+          </p:nvPr>
+        </p:nvSpPr>
+        <p:spPr/>
+        <p:txBody>
+          <a:bodyPr/>
+          <a:lstStyle/>
+          <a:p>
+            <a:fld id="{C149EEB9-1E5D-4336-B1B3-152F63E4D131}" type="slidenum">
+              <a:rPr lang="en-US" smtClean="0"/>
+              <a:t>14</a:t>
+            </a:fld>
+            <a:endParaRPr lang="en-US" dirty="0"/>
+          </a:p>
+        </p:txBody>
+      </p:sp>
+    </p:spTree>
+    <p:extLst>
+      <p:ext uri="{BB962C8B-B14F-4D97-AF65-F5344CB8AC3E}">
+        <p14:creationId xmlns:p14="http://schemas.microsoft.com/office/powerpoint/2010/main" val="3562569891"/>
+      </p:ext>
+    </p:extLst>
+  </p:cSld>
+  <p:clrMapOvr>
+    <a:masterClrMapping/>
+  </p:clrMapOvr>
+</p:notes>
+</file>
+
+<file path=ppt/notesSlides/notesSlide12.xml><?xml version="1.0" encoding="utf-8"?>
+<p:notes xmlns:a="http://schemas.openxmlformats.org/drawingml/2006/main" xmlns:r="http://schemas.openxmlformats.org/officeDocument/2006/relationships" xmlns:p="http://schemas.openxmlformats.org/presentationml/2006/main">
+  <p:cSld>
+    <p:spTree>
+      <p:nvGrpSpPr>
+        <p:cNvPr id="1" name="">
+          <a:extLst>
+            <a:ext uri="{FF2B5EF4-FFF2-40B4-BE49-F238E27FC236}">
               <a16:creationId xmlns:a16="http://schemas.microsoft.com/office/drawing/2014/main" id="{D97AFC43-97F2-B87D-3D35-A997FB4BFADA}"/>
             </a:ext>
           </a:extLst>
@@ -1309,7 +1667,7 @@
           <a:p>
             <a:fld id="{C149EEB9-1E5D-4336-B1B3-152F63E4D131}" type="slidenum">
               <a:rPr lang="en-US" smtClean="0"/>
-              <a:t>13</a:t>
+              <a:t>15</a:t>
             </a:fld>
             <a:endParaRPr lang="en-US" dirty="0"/>
           </a:p>
@@ -1328,7 +1686,357 @@
 </p:notes>
 </file>
 
-<file path=ppt/notesSlides/notesSlide11.xml><?xml version="1.0" encoding="utf-8"?>
+<file path=ppt/notesSlides/notesSlide13.xml><?xml version="1.0" encoding="utf-8"?>
+<p:notes xmlns:a="http://schemas.openxmlformats.org/drawingml/2006/main" xmlns:r="http://schemas.openxmlformats.org/officeDocument/2006/relationships" xmlns:p="http://schemas.openxmlformats.org/presentationml/2006/main">
+  <p:cSld>
+    <p:spTree>
+      <p:nvGrpSpPr>
+        <p:cNvPr id="1" name="">
+          <a:extLst>
+            <a:ext uri="{FF2B5EF4-FFF2-40B4-BE49-F238E27FC236}">
+              <a16:creationId xmlns:a16="http://schemas.microsoft.com/office/drawing/2014/main" id="{81CCACE8-9CFA-445A-6625-B2808495B261}"/>
+            </a:ext>
+          </a:extLst>
+        </p:cNvPr>
+        <p:cNvGrpSpPr/>
+        <p:nvPr/>
+      </p:nvGrpSpPr>
+      <p:grpSpPr>
+        <a:xfrm>
+          <a:off x="0" y="0"/>
+          <a:ext cx="0" cy="0"/>
+          <a:chOff x="0" y="0"/>
+          <a:chExt cx="0" cy="0"/>
+        </a:xfrm>
+      </p:grpSpPr>
+      <p:sp>
+        <p:nvSpPr>
+          <p:cNvPr id="2" name="Slide Image Placeholder 1">
+            <a:extLst>
+              <a:ext uri="{FF2B5EF4-FFF2-40B4-BE49-F238E27FC236}">
+                <a16:creationId xmlns:a16="http://schemas.microsoft.com/office/drawing/2014/main" id="{709A58CD-9572-1C01-62F2-3673C698F79A}"/>
+              </a:ext>
+            </a:extLst>
+          </p:cNvPr>
+          <p:cNvSpPr>
+            <a:spLocks noGrp="1" noRot="1" noChangeAspect="1"/>
+          </p:cNvSpPr>
+          <p:nvPr>
+            <p:ph type="sldImg"/>
+          </p:nvPr>
+        </p:nvSpPr>
+        <p:spPr/>
+      </p:sp>
+      <p:sp>
+        <p:nvSpPr>
+          <p:cNvPr id="3" name="Notes Placeholder 2">
+            <a:extLst>
+              <a:ext uri="{FF2B5EF4-FFF2-40B4-BE49-F238E27FC236}">
+                <a16:creationId xmlns:a16="http://schemas.microsoft.com/office/drawing/2014/main" id="{54674116-052C-F303-9277-F586CD72E8CF}"/>
+              </a:ext>
+            </a:extLst>
+          </p:cNvPr>
+          <p:cNvSpPr>
+            <a:spLocks noGrp="1"/>
+          </p:cNvSpPr>
+          <p:nvPr>
+            <p:ph type="body" idx="1"/>
+          </p:nvPr>
+        </p:nvSpPr>
+        <p:spPr/>
+        <p:txBody>
+          <a:bodyPr/>
+          <a:lstStyle/>
+          <a:p>
+            <a:r>
+              <a:rPr lang="en-US" dirty="0"/>
+              <a:t>Gain scheduling is useful when the plant behaves differently in different regions, for example at low versus high speed, light versus heavy load, or small versus large angle. Instead of forcing one fixed controller to handle the whole range, we tune several local controllers and switch or interpolate between them based on a scheduling variable. The key idea is simple, but implementation needs care. The scheduling variable should be measurable and physically meaningful, the gains should vary smoothly to avoid abrupt control changes, and transitions must be tested because a controller that looks good at each operating point can still behave poorly while moving between them.</a:t>
+            </a:r>
+            <a:br>
+              <a:rPr lang="en-US" dirty="0">
+                <a:cs typeface="+mn-lt"/>
+              </a:rPr>
+            </a:br>
+            <a:br>
+              <a:rPr lang="en-US" dirty="0">
+                <a:cs typeface="+mn-lt"/>
+              </a:rPr>
+            </a:br>
+            <a:r>
+              <a:rPr lang="en-US" dirty="0"/>
+              <a:t>[Sources]</a:t>
+            </a:r>
+            <a:br>
+              <a:rPr lang="en-US" dirty="0">
+                <a:cs typeface="+mn-lt"/>
+              </a:rPr>
+            </a:br>
+            <a:r>
+              <a:rPr lang="en-US" dirty="0"/>
+              <a:t>MathWorks Simulink PID Controller documentation: derivative filtering, output saturation, anti-windup, and controller structure.</a:t>
+            </a:r>
+            <a:br>
+              <a:rPr lang="en-US" dirty="0">
+                <a:cs typeface="+mn-lt"/>
+              </a:rPr>
+            </a:br>
+            <a:r>
+              <a:rPr lang="en-US" dirty="0"/>
+              <a:t>Caltech FBS Wiki PID Control chapter: PID roles, integrator windup, and tuning overview.</a:t>
+            </a:r>
+            <a:br>
+              <a:rPr lang="en-US" dirty="0">
+                <a:cs typeface="+mn-lt"/>
+              </a:rPr>
+            </a:br>
+            <a:r>
+              <a:rPr lang="en-US" dirty="0"/>
+              <a:t>Engineering </a:t>
+            </a:r>
+            <a:r>
+              <a:rPr lang="en-US" dirty="0" err="1"/>
+              <a:t>LibreTexts</a:t>
+            </a:r>
+            <a:r>
+              <a:rPr lang="en-US" dirty="0"/>
+              <a:t> PID tuning via classical methods: Ziegler-Nichols experimental tuning concepts.</a:t>
+            </a:r>
+            <a:br>
+              <a:rPr lang="en-US" dirty="0">
+                <a:cs typeface="+mn-lt"/>
+              </a:rPr>
+            </a:br>
+            <a:r>
+              <a:rPr lang="en-US" dirty="0"/>
+              <a:t>Wikipedia: PID controller and Ziegler-Nichols method for standard definitions and classic formulas.</a:t>
+            </a:r>
+          </a:p>
+          <a:p>
+            <a:endParaRPr lang="en-US" dirty="0">
+              <a:ea typeface="Calibri"/>
+              <a:cs typeface="Calibri"/>
+            </a:endParaRPr>
+          </a:p>
+        </p:txBody>
+      </p:sp>
+      <p:sp>
+        <p:nvSpPr>
+          <p:cNvPr id="4" name="Slide Number Placeholder 3">
+            <a:extLst>
+              <a:ext uri="{FF2B5EF4-FFF2-40B4-BE49-F238E27FC236}">
+                <a16:creationId xmlns:a16="http://schemas.microsoft.com/office/drawing/2014/main" id="{0F75170C-9918-9782-8D24-03698A27D6F2}"/>
+              </a:ext>
+            </a:extLst>
+          </p:cNvPr>
+          <p:cNvSpPr>
+            <a:spLocks noGrp="1"/>
+          </p:cNvSpPr>
+          <p:nvPr>
+            <p:ph type="sldNum" sz="quarter" idx="5"/>
+          </p:nvPr>
+        </p:nvSpPr>
+        <p:spPr/>
+        <p:txBody>
+          <a:bodyPr/>
+          <a:lstStyle/>
+          <a:p>
+            <a:fld id="{C149EEB9-1E5D-4336-B1B3-152F63E4D131}" type="slidenum">
+              <a:rPr lang="en-US" smtClean="0"/>
+              <a:t>16</a:t>
+            </a:fld>
+            <a:endParaRPr lang="en-US" dirty="0"/>
+          </a:p>
+        </p:txBody>
+      </p:sp>
+    </p:spTree>
+    <p:extLst>
+      <p:ext uri="{BB962C8B-B14F-4D97-AF65-F5344CB8AC3E}">
+        <p14:creationId xmlns:p14="http://schemas.microsoft.com/office/powerpoint/2010/main" val="451273475"/>
+      </p:ext>
+    </p:extLst>
+  </p:cSld>
+  <p:clrMapOvr>
+    <a:masterClrMapping/>
+  </p:clrMapOvr>
+</p:notes>
+</file>
+
+<file path=ppt/notesSlides/notesSlide14.xml><?xml version="1.0" encoding="utf-8"?>
+<p:notes xmlns:a="http://schemas.openxmlformats.org/drawingml/2006/main" xmlns:r="http://schemas.openxmlformats.org/officeDocument/2006/relationships" xmlns:p="http://schemas.openxmlformats.org/presentationml/2006/main">
+  <p:cSld>
+    <p:spTree>
+      <p:nvGrpSpPr>
+        <p:cNvPr id="1" name="">
+          <a:extLst>
+            <a:ext uri="{FF2B5EF4-FFF2-40B4-BE49-F238E27FC236}">
+              <a16:creationId xmlns:a16="http://schemas.microsoft.com/office/drawing/2014/main" id="{927DA65C-29E5-27C7-34F1-82B27611C3A6}"/>
+            </a:ext>
+          </a:extLst>
+        </p:cNvPr>
+        <p:cNvGrpSpPr/>
+        <p:nvPr/>
+      </p:nvGrpSpPr>
+      <p:grpSpPr>
+        <a:xfrm>
+          <a:off x="0" y="0"/>
+          <a:ext cx="0" cy="0"/>
+          <a:chOff x="0" y="0"/>
+          <a:chExt cx="0" cy="0"/>
+        </a:xfrm>
+      </p:grpSpPr>
+      <p:sp>
+        <p:nvSpPr>
+          <p:cNvPr id="2" name="Slide Image Placeholder 1">
+            <a:extLst>
+              <a:ext uri="{FF2B5EF4-FFF2-40B4-BE49-F238E27FC236}">
+                <a16:creationId xmlns:a16="http://schemas.microsoft.com/office/drawing/2014/main" id="{3D7876E5-1212-064A-57B6-958C42180A43}"/>
+              </a:ext>
+            </a:extLst>
+          </p:cNvPr>
+          <p:cNvSpPr>
+            <a:spLocks noGrp="1" noRot="1" noChangeAspect="1"/>
+          </p:cNvSpPr>
+          <p:nvPr>
+            <p:ph type="sldImg"/>
+          </p:nvPr>
+        </p:nvSpPr>
+        <p:spPr/>
+      </p:sp>
+      <p:sp>
+        <p:nvSpPr>
+          <p:cNvPr id="3" name="Notes Placeholder 2">
+            <a:extLst>
+              <a:ext uri="{FF2B5EF4-FFF2-40B4-BE49-F238E27FC236}">
+                <a16:creationId xmlns:a16="http://schemas.microsoft.com/office/drawing/2014/main" id="{5F14F18A-FE09-732B-529C-637AE946FDB2}"/>
+              </a:ext>
+            </a:extLst>
+          </p:cNvPr>
+          <p:cNvSpPr>
+            <a:spLocks noGrp="1"/>
+          </p:cNvSpPr>
+          <p:nvPr>
+            <p:ph type="body" idx="1"/>
+          </p:nvPr>
+        </p:nvSpPr>
+        <p:spPr/>
+        <p:txBody>
+          <a:bodyPr/>
+          <a:lstStyle/>
+          <a:p>
+            <a:r>
+              <a:rPr lang="en-US" dirty="0"/>
+              <a:t>Gain scheduling is useful when the plant behaves differently in different regions, for example at low versus high speed, light versus heavy load, or small versus large angle. Instead of forcing one fixed controller to handle the whole range, we tune several local controllers and switch or interpolate between them based on a scheduling variable. The key idea is simple, but implementation needs care. The scheduling variable should be measurable and physically meaningful, the gains should vary smoothly to avoid abrupt control changes, and transitions must be tested because a controller that looks good at each operating point can still behave poorly while moving between them.</a:t>
+            </a:r>
+            <a:br>
+              <a:rPr lang="en-US" dirty="0">
+                <a:cs typeface="+mn-lt"/>
+              </a:rPr>
+            </a:br>
+            <a:br>
+              <a:rPr lang="en-US" dirty="0">
+                <a:cs typeface="+mn-lt"/>
+              </a:rPr>
+            </a:br>
+            <a:r>
+              <a:rPr lang="en-US" dirty="0"/>
+              <a:t>[Sources]</a:t>
+            </a:r>
+            <a:br>
+              <a:rPr lang="en-US" dirty="0">
+                <a:cs typeface="+mn-lt"/>
+              </a:rPr>
+            </a:br>
+            <a:r>
+              <a:rPr lang="en-US" dirty="0"/>
+              <a:t>MathWorks Simulink PID Controller documentation: derivative filtering, output saturation, anti-windup, and controller structure.</a:t>
+            </a:r>
+            <a:br>
+              <a:rPr lang="en-US" dirty="0">
+                <a:cs typeface="+mn-lt"/>
+              </a:rPr>
+            </a:br>
+            <a:r>
+              <a:rPr lang="en-US" dirty="0"/>
+              <a:t>Caltech FBS Wiki PID Control chapter: PID roles, integrator windup, and tuning overview.</a:t>
+            </a:r>
+            <a:br>
+              <a:rPr lang="en-US" dirty="0">
+                <a:cs typeface="+mn-lt"/>
+              </a:rPr>
+            </a:br>
+            <a:r>
+              <a:rPr lang="en-US" dirty="0"/>
+              <a:t>Engineering </a:t>
+            </a:r>
+            <a:r>
+              <a:rPr lang="en-US" dirty="0" err="1"/>
+              <a:t>LibreTexts</a:t>
+            </a:r>
+            <a:r>
+              <a:rPr lang="en-US" dirty="0"/>
+              <a:t> PID tuning via classical methods: Ziegler-Nichols experimental tuning concepts.</a:t>
+            </a:r>
+            <a:br>
+              <a:rPr lang="en-US" dirty="0">
+                <a:cs typeface="+mn-lt"/>
+              </a:rPr>
+            </a:br>
+            <a:r>
+              <a:rPr lang="en-US" dirty="0"/>
+              <a:t>Wikipedia: PID controller and Ziegler-Nichols method for standard definitions and classic formulas.</a:t>
+            </a:r>
+          </a:p>
+          <a:p>
+            <a:endParaRPr lang="en-US" dirty="0">
+              <a:ea typeface="Calibri"/>
+              <a:cs typeface="Calibri"/>
+            </a:endParaRPr>
+          </a:p>
+        </p:txBody>
+      </p:sp>
+      <p:sp>
+        <p:nvSpPr>
+          <p:cNvPr id="4" name="Slide Number Placeholder 3">
+            <a:extLst>
+              <a:ext uri="{FF2B5EF4-FFF2-40B4-BE49-F238E27FC236}">
+                <a16:creationId xmlns:a16="http://schemas.microsoft.com/office/drawing/2014/main" id="{08F2624C-7165-033D-7984-ABE1B9F1D44C}"/>
+              </a:ext>
+            </a:extLst>
+          </p:cNvPr>
+          <p:cNvSpPr>
+            <a:spLocks noGrp="1"/>
+          </p:cNvSpPr>
+          <p:nvPr>
+            <p:ph type="sldNum" sz="quarter" idx="5"/>
+          </p:nvPr>
+        </p:nvSpPr>
+        <p:spPr/>
+        <p:txBody>
+          <a:bodyPr/>
+          <a:lstStyle/>
+          <a:p>
+            <a:fld id="{C149EEB9-1E5D-4336-B1B3-152F63E4D131}" type="slidenum">
+              <a:rPr lang="en-US" smtClean="0"/>
+              <a:t>17</a:t>
+            </a:fld>
+            <a:endParaRPr lang="en-US" dirty="0"/>
+          </a:p>
+        </p:txBody>
+      </p:sp>
+    </p:spTree>
+    <p:extLst>
+      <p:ext uri="{BB962C8B-B14F-4D97-AF65-F5344CB8AC3E}">
+        <p14:creationId xmlns:p14="http://schemas.microsoft.com/office/powerpoint/2010/main" val="32861086"/>
+      </p:ext>
+    </p:extLst>
+  </p:cSld>
+  <p:clrMapOvr>
+    <a:masterClrMapping/>
+  </p:clrMapOvr>
+</p:notes>
+</file>
+
+<file path=ppt/notesSlides/notesSlide15.xml><?xml version="1.0" encoding="utf-8"?>
 <p:notes xmlns:a="http://schemas.openxmlformats.org/drawingml/2006/main" xmlns:r="http://schemas.openxmlformats.org/officeDocument/2006/relationships" xmlns:p="http://schemas.openxmlformats.org/presentationml/2006/main">
   <p:cSld>
     <p:spTree>
@@ -1420,7 +2128,7 @@
           <a:p>
             <a:fld id="{C149EEB9-1E5D-4336-B1B3-152F63E4D131}" type="slidenum">
               <a:rPr lang="en-US" smtClean="0"/>
-              <a:t>14</a:t>
+              <a:t>18</a:t>
             </a:fld>
             <a:endParaRPr lang="en-US" dirty="0"/>
           </a:p>
@@ -2282,7 +2990,7 @@
         <p:cNvPr id="1" name="">
           <a:extLst>
             <a:ext uri="{FF2B5EF4-FFF2-40B4-BE49-F238E27FC236}">
-              <a16:creationId xmlns:a16="http://schemas.microsoft.com/office/drawing/2014/main" id="{36FB7DF0-D361-81EB-02F4-6E91B0F71BF1}"/>
+              <a16:creationId xmlns:a16="http://schemas.microsoft.com/office/drawing/2014/main" id="{4B1C40BC-8100-EA36-6A9C-71DF58FF463F}"/>
             </a:ext>
           </a:extLst>
         </p:cNvPr>
@@ -2302,7 +3010,7 @@
           <p:cNvPr id="2" name="Slide Image Placeholder 1">
             <a:extLst>
               <a:ext uri="{FF2B5EF4-FFF2-40B4-BE49-F238E27FC236}">
-                <a16:creationId xmlns:a16="http://schemas.microsoft.com/office/drawing/2014/main" id="{7CDE728C-C928-FCEA-CF4A-E855F19FD927}"/>
+                <a16:creationId xmlns:a16="http://schemas.microsoft.com/office/drawing/2014/main" id="{A04E4025-E9BE-3F39-5811-06DD644B5A2F}"/>
               </a:ext>
             </a:extLst>
           </p:cNvPr>
@@ -2320,7 +3028,7 @@
           <p:cNvPr id="3" name="Notes Placeholder 2">
             <a:extLst>
               <a:ext uri="{FF2B5EF4-FFF2-40B4-BE49-F238E27FC236}">
-                <a16:creationId xmlns:a16="http://schemas.microsoft.com/office/drawing/2014/main" id="{F94F3F3A-F515-7D84-ACBB-3101695BD778}"/>
+                <a16:creationId xmlns:a16="http://schemas.microsoft.com/office/drawing/2014/main" id="{3D99B351-A54D-3DF4-4454-969A5FA3A6D4}"/>
               </a:ext>
             </a:extLst>
           </p:cNvPr>
@@ -2338,7 +3046,7 @@
           <a:p>
             <a:r>
               <a:rPr lang="en-US" dirty="0"/>
-              <a:t>Integral windup appears when the actuator hits a limit, such as maximum voltage, valve position, or duty cycle. The controller output cannot increase further, but the integrator may keep accumulating error as if more authority were available. When the loop finally leaves saturation, that stored integral action causes sluggish recovery or large overshoot. Anti-windup methods try to stop that buildup. The simplest approach is clamping, where the integrator is paused or limited when the output is saturated in the wrong direction. A more systematic method is back-calculation, which feeds the difference between the unsaturated and saturated outputs back into the integrator state.</a:t>
+              <a:t>The Ziegler-Nichols closed-loop method is a classic heuristic for getting initial PID gains. You disable integral and derivative action, then increase proportional gain until the loop reaches sustained oscillation. That gain is the ultimate gain, Ku, and the oscillation period is Pu. The Ziegler-Nichols formulas convert those two measured quantities into initial controller settings. The benefit is that the method is simple and does not require a detailed process model. The downside is that it tends to produce aggressive tuning with noticeable overshoot, so it should be treated as a starting point that is refined afterward based on the real design goals.</a:t>
             </a:r>
             <a:br>
               <a:rPr lang="en-US" dirty="0">
@@ -2412,7 +3120,7 @@
           <p:cNvPr id="4" name="Slide Number Placeholder 3">
             <a:extLst>
               <a:ext uri="{FF2B5EF4-FFF2-40B4-BE49-F238E27FC236}">
-                <a16:creationId xmlns:a16="http://schemas.microsoft.com/office/drawing/2014/main" id="{C31F3703-B4D4-EA12-2EF3-CD6702A3CE0B}"/>
+                <a16:creationId xmlns:a16="http://schemas.microsoft.com/office/drawing/2014/main" id="{A2C83FEA-3527-0416-E5A7-4C4F56149F42}"/>
               </a:ext>
             </a:extLst>
           </p:cNvPr>
@@ -2439,7 +3147,7 @@
     </p:spTree>
     <p:extLst>
       <p:ext uri="{BB962C8B-B14F-4D97-AF65-F5344CB8AC3E}">
-        <p14:creationId xmlns:p14="http://schemas.microsoft.com/office/powerpoint/2010/main" val="3172263237"/>
+        <p14:creationId xmlns:p14="http://schemas.microsoft.com/office/powerpoint/2010/main" val="1070469808"/>
       </p:ext>
     </p:extLst>
   </p:cSld>
@@ -2457,7 +3165,7 @@
         <p:cNvPr id="1" name="">
           <a:extLst>
             <a:ext uri="{FF2B5EF4-FFF2-40B4-BE49-F238E27FC236}">
-              <a16:creationId xmlns:a16="http://schemas.microsoft.com/office/drawing/2014/main" id="{D8145B60-1E27-D5AC-4FDB-72599364DB0E}"/>
+              <a16:creationId xmlns:a16="http://schemas.microsoft.com/office/drawing/2014/main" id="{A6853395-2DAA-A965-A34E-47A02FEED0BA}"/>
             </a:ext>
           </a:extLst>
         </p:cNvPr>
@@ -2477,7 +3185,7 @@
           <p:cNvPr id="2" name="Slide Image Placeholder 1">
             <a:extLst>
               <a:ext uri="{FF2B5EF4-FFF2-40B4-BE49-F238E27FC236}">
-                <a16:creationId xmlns:a16="http://schemas.microsoft.com/office/drawing/2014/main" id="{AC6B062A-DCAF-4905-0728-3956060B27AB}"/>
+                <a16:creationId xmlns:a16="http://schemas.microsoft.com/office/drawing/2014/main" id="{CD010834-28B8-EFEB-0129-C169EE408F8D}"/>
               </a:ext>
             </a:extLst>
           </p:cNvPr>
@@ -2495,7 +3203,7 @@
           <p:cNvPr id="3" name="Notes Placeholder 2">
             <a:extLst>
               <a:ext uri="{FF2B5EF4-FFF2-40B4-BE49-F238E27FC236}">
-                <a16:creationId xmlns:a16="http://schemas.microsoft.com/office/drawing/2014/main" id="{D9DB388B-26C2-AD91-EC8D-EBD86B1092D8}"/>
+                <a16:creationId xmlns:a16="http://schemas.microsoft.com/office/drawing/2014/main" id="{647B6C6B-F602-A321-7DE2-24FE074735AF}"/>
               </a:ext>
             </a:extLst>
           </p:cNvPr>
@@ -2513,7 +3221,7 @@
           <a:p>
             <a:r>
               <a:rPr lang="en-US" dirty="0"/>
-              <a:t>A more systematic method is back-calculation, which feeds the difference between the unsaturated and saturated outputs back into the integrator state.</a:t>
+              <a:t>The Ziegler-Nichols closed-loop method is a classic heuristic for getting initial PID gains. You disable integral and derivative action, then increase proportional gain until the loop reaches sustained oscillation. That gain is the ultimate gain, Ku, and the oscillation period is Pu. The Ziegler-Nichols formulas convert those two measured quantities into initial controller settings. The benefit is that the method is simple and does not require a detailed process model. The downside is that it tends to produce aggressive tuning with noticeable overshoot, so it should be treated as a starting point that is refined afterward based on the real design goals.</a:t>
             </a:r>
             <a:br>
               <a:rPr lang="en-US" dirty="0">
@@ -2587,7 +3295,7 @@
           <p:cNvPr id="4" name="Slide Number Placeholder 3">
             <a:extLst>
               <a:ext uri="{FF2B5EF4-FFF2-40B4-BE49-F238E27FC236}">
-                <a16:creationId xmlns:a16="http://schemas.microsoft.com/office/drawing/2014/main" id="{03EC3CD4-88B1-442A-4917-A9C9A8134D85}"/>
+                <a16:creationId xmlns:a16="http://schemas.microsoft.com/office/drawing/2014/main" id="{391F042F-D67A-A5AA-A70D-9B79EA9A21E7}"/>
               </a:ext>
             </a:extLst>
           </p:cNvPr>
@@ -2614,7 +3322,7 @@
     </p:spTree>
     <p:extLst>
       <p:ext uri="{BB962C8B-B14F-4D97-AF65-F5344CB8AC3E}">
-        <p14:creationId xmlns:p14="http://schemas.microsoft.com/office/powerpoint/2010/main" val="3562569891"/>
+        <p14:creationId xmlns:p14="http://schemas.microsoft.com/office/powerpoint/2010/main" val="1290309102"/>
       </p:ext>
     </p:extLst>
   </p:cSld>
@@ -2632,7 +3340,7 @@
         <p:cNvPr id="1" name="">
           <a:extLst>
             <a:ext uri="{FF2B5EF4-FFF2-40B4-BE49-F238E27FC236}">
-              <a16:creationId xmlns:a16="http://schemas.microsoft.com/office/drawing/2014/main" id="{4B1C40BC-8100-EA36-6A9C-71DF58FF463F}"/>
+              <a16:creationId xmlns:a16="http://schemas.microsoft.com/office/drawing/2014/main" id="{36FB7DF0-D361-81EB-02F4-6E91B0F71BF1}"/>
             </a:ext>
           </a:extLst>
         </p:cNvPr>
@@ -2652,7 +3360,7 @@
           <p:cNvPr id="2" name="Slide Image Placeholder 1">
             <a:extLst>
               <a:ext uri="{FF2B5EF4-FFF2-40B4-BE49-F238E27FC236}">
-                <a16:creationId xmlns:a16="http://schemas.microsoft.com/office/drawing/2014/main" id="{A04E4025-E9BE-3F39-5811-06DD644B5A2F}"/>
+                <a16:creationId xmlns:a16="http://schemas.microsoft.com/office/drawing/2014/main" id="{7CDE728C-C928-FCEA-CF4A-E855F19FD927}"/>
               </a:ext>
             </a:extLst>
           </p:cNvPr>
@@ -2670,7 +3378,7 @@
           <p:cNvPr id="3" name="Notes Placeholder 2">
             <a:extLst>
               <a:ext uri="{FF2B5EF4-FFF2-40B4-BE49-F238E27FC236}">
-                <a16:creationId xmlns:a16="http://schemas.microsoft.com/office/drawing/2014/main" id="{3D99B351-A54D-3DF4-4454-969A5FA3A6D4}"/>
+                <a16:creationId xmlns:a16="http://schemas.microsoft.com/office/drawing/2014/main" id="{F94F3F3A-F515-7D84-ACBB-3101695BD778}"/>
               </a:ext>
             </a:extLst>
           </p:cNvPr>
@@ -2688,7 +3396,7 @@
           <a:p>
             <a:r>
               <a:rPr lang="en-US" dirty="0"/>
-              <a:t>The Ziegler-Nichols closed-loop method is a classic heuristic for getting initial PID gains. You disable integral and derivative action, then increase proportional gain until the loop reaches sustained oscillation. That gain is the ultimate gain, Ku, and the oscillation period is Pu. The Ziegler-Nichols formulas convert those two measured quantities into initial controller settings. The benefit is that the method is simple and does not require a detailed process model. The downside is that it tends to produce aggressive tuning with noticeable overshoot, so it should be treated as a starting point that is refined afterward based on the real design goals.</a:t>
+              <a:t>Integral windup appears when the actuator hits a limit, such as maximum voltage, valve position, or duty cycle. The controller output cannot increase further, but the integrator may keep accumulating error as if more authority were available. When the loop finally leaves saturation, that stored integral action causes sluggish recovery or large overshoot. Anti-windup methods try to stop that buildup. The simplest approach is clamping, where the integrator is paused or limited when the output is saturated in the wrong direction. A more systematic method is back-calculation, which feeds the difference between the unsaturated and saturated outputs back into the integrator state.</a:t>
             </a:r>
             <a:br>
               <a:rPr lang="en-US" dirty="0">
@@ -2762,7 +3470,7 @@
           <p:cNvPr id="4" name="Slide Number Placeholder 3">
             <a:extLst>
               <a:ext uri="{FF2B5EF4-FFF2-40B4-BE49-F238E27FC236}">
-                <a16:creationId xmlns:a16="http://schemas.microsoft.com/office/drawing/2014/main" id="{A2C83FEA-3527-0416-E5A7-4C4F56149F42}"/>
+                <a16:creationId xmlns:a16="http://schemas.microsoft.com/office/drawing/2014/main" id="{C31F3703-B4D4-EA12-2EF3-CD6702A3CE0B}"/>
               </a:ext>
             </a:extLst>
           </p:cNvPr>
@@ -2789,7 +3497,7 @@
     </p:spTree>
     <p:extLst>
       <p:ext uri="{BB962C8B-B14F-4D97-AF65-F5344CB8AC3E}">
-        <p14:creationId xmlns:p14="http://schemas.microsoft.com/office/powerpoint/2010/main" val="1070469808"/>
+        <p14:creationId xmlns:p14="http://schemas.microsoft.com/office/powerpoint/2010/main" val="3172263237"/>
       </p:ext>
     </p:extLst>
   </p:cSld>
@@ -4866,6 +5574,83 @@
           </a:p>
         </p:txBody>
       </p:sp>
+      <p:pic>
+        <p:nvPicPr>
+          <p:cNvPr id="1025" name="Picture 1">
+            <a:extLst>
+              <a:ext uri="{FF2B5EF4-FFF2-40B4-BE49-F238E27FC236}">
+                <a16:creationId xmlns:a16="http://schemas.microsoft.com/office/drawing/2014/main" id="{057496A8-DC1A-3C40-6375-D924B422A5CE}"/>
+              </a:ext>
+            </a:extLst>
+          </p:cNvPr>
+          <p:cNvPicPr>
+            <a:picLocks noChangeAspect="1" noChangeArrowheads="1"/>
+          </p:cNvPicPr>
+          <p:nvPr/>
+        </p:nvPicPr>
+        <p:blipFill>
+          <a:blip r:embed="rId3">
+            <a:extLst>
+              <a:ext uri="{28A0092B-C50C-407E-A947-70E740481C1C}">
+                <a14:useLocalDpi xmlns:a14="http://schemas.microsoft.com/office/drawing/2010/main" val="0"/>
+              </a:ext>
+            </a:extLst>
+          </a:blip>
+          <a:srcRect/>
+          <a:stretch>
+            <a:fillRect/>
+          </a:stretch>
+        </p:blipFill>
+        <p:spPr bwMode="auto">
+          <a:xfrm>
+            <a:off x="99203" y="4407207"/>
+            <a:ext cx="3890712" cy="1385093"/>
+          </a:xfrm>
+          <a:prstGeom prst="rect">
+            <a:avLst/>
+          </a:prstGeom>
+          <a:noFill/>
+          <a:extLst>
+            <a:ext uri="{909E8E84-426E-40DD-AFC4-6F175D3DCCD1}">
+              <a14:hiddenFill xmlns:a14="http://schemas.microsoft.com/office/drawing/2010/main">
+                <a:solidFill>
+                  <a:srgbClr val="FFFFFF"/>
+                </a:solidFill>
+              </a14:hiddenFill>
+            </a:ext>
+          </a:extLst>
+        </p:spPr>
+      </p:pic>
+      <p:pic>
+        <p:nvPicPr>
+          <p:cNvPr id="10" name="Picture 9">
+            <a:extLst>
+              <a:ext uri="{FF2B5EF4-FFF2-40B4-BE49-F238E27FC236}">
+                <a16:creationId xmlns:a16="http://schemas.microsoft.com/office/drawing/2014/main" id="{76C9202D-1DAC-7B39-ABEE-93CC26038E26}"/>
+              </a:ext>
+            </a:extLst>
+          </p:cNvPr>
+          <p:cNvPicPr>
+            <a:picLocks noChangeAspect="1"/>
+          </p:cNvPicPr>
+          <p:nvPr/>
+        </p:nvPicPr>
+        <p:blipFill>
+          <a:blip r:embed="rId4"/>
+          <a:stretch>
+            <a:fillRect/>
+          </a:stretch>
+        </p:blipFill>
+        <p:spPr>
+          <a:xfrm>
+            <a:off x="9816004" y="151566"/>
+            <a:ext cx="2276793" cy="5744377"/>
+          </a:xfrm>
+          <a:prstGeom prst="rect">
+            <a:avLst/>
+          </a:prstGeom>
+        </p:spPr>
+      </p:pic>
     </p:spTree>
     <p:extLst>
       <p:ext uri="{BB962C8B-B14F-4D97-AF65-F5344CB8AC3E}">
@@ -4880,465 +5665,6 @@
 </file>
 
 <file path=ppt/slides/slide10.xml><?xml version="1.0" encoding="utf-8"?>
-<p:sld xmlns:a="http://schemas.openxmlformats.org/drawingml/2006/main" xmlns:r="http://schemas.openxmlformats.org/officeDocument/2006/relationships" xmlns:p="http://schemas.openxmlformats.org/presentationml/2006/main">
-  <p:cSld>
-    <p:spTree>
-      <p:nvGrpSpPr>
-        <p:cNvPr id="1" name="">
-          <a:extLst>
-            <a:ext uri="{FF2B5EF4-FFF2-40B4-BE49-F238E27FC236}">
-              <a16:creationId xmlns:a16="http://schemas.microsoft.com/office/drawing/2014/main" id="{93D29A0B-800F-7E92-EBFB-A41D83A55604}"/>
-            </a:ext>
-          </a:extLst>
-        </p:cNvPr>
-        <p:cNvGrpSpPr/>
-        <p:nvPr/>
-      </p:nvGrpSpPr>
-      <p:grpSpPr>
-        <a:xfrm>
-          <a:off x="0" y="0"/>
-          <a:ext cx="0" cy="0"/>
-          <a:chOff x="0" y="0"/>
-          <a:chExt cx="0" cy="0"/>
-        </a:xfrm>
-      </p:grpSpPr>
-      <p:sp>
-        <p:nvSpPr>
-          <p:cNvPr id="4" name="Footer Placeholder 3">
-            <a:extLst>
-              <a:ext uri="{FF2B5EF4-FFF2-40B4-BE49-F238E27FC236}">
-                <a16:creationId xmlns:a16="http://schemas.microsoft.com/office/drawing/2014/main" id="{46984DD0-DBF2-7A9C-4BA1-C4ACA2A18E96}"/>
-              </a:ext>
-            </a:extLst>
-          </p:cNvPr>
-          <p:cNvSpPr>
-            <a:spLocks noGrp="1"/>
-          </p:cNvSpPr>
-          <p:nvPr>
-            <p:ph type="ftr" sz="quarter" idx="11"/>
-          </p:nvPr>
-        </p:nvSpPr>
-        <p:spPr/>
-        <p:txBody>
-          <a:bodyPr/>
-          <a:lstStyle/>
-          <a:p>
-            <a:r>
-              <a:rPr lang="en-US" dirty="0"/>
-              <a:t>CSSC @ </a:t>
-            </a:r>
-            <a:r>
-              <a:rPr lang="en-US" dirty="0" err="1"/>
-              <a:t>UTDallas</a:t>
-            </a:r>
-            <a:endParaRPr lang="en-US" dirty="0"/>
-          </a:p>
-        </p:txBody>
-      </p:sp>
-      <p:sp>
-        <p:nvSpPr>
-          <p:cNvPr id="5" name="Slide Number Placeholder 4">
-            <a:extLst>
-              <a:ext uri="{FF2B5EF4-FFF2-40B4-BE49-F238E27FC236}">
-                <a16:creationId xmlns:a16="http://schemas.microsoft.com/office/drawing/2014/main" id="{3E3CA680-BC4F-545E-A23B-86CB0A769703}"/>
-              </a:ext>
-            </a:extLst>
-          </p:cNvPr>
-          <p:cNvSpPr>
-            <a:spLocks noGrp="1"/>
-          </p:cNvSpPr>
-          <p:nvPr>
-            <p:ph type="sldNum" sz="quarter" idx="12"/>
-          </p:nvPr>
-        </p:nvSpPr>
-        <p:spPr/>
-        <p:txBody>
-          <a:bodyPr/>
-          <a:lstStyle/>
-          <a:p>
-            <a:fld id="{C68DACDF-E1A9-A04C-A5FF-FC2443684BF5}" type="slidenum">
-              <a:rPr lang="en-US" smtClean="0"/>
-              <a:pPr/>
-              <a:t>10</a:t>
-            </a:fld>
-            <a:endParaRPr lang="en-US" dirty="0"/>
-          </a:p>
-        </p:txBody>
-      </p:sp>
-      <p:sp>
-        <p:nvSpPr>
-          <p:cNvPr id="3" name="Title 1">
-            <a:extLst>
-              <a:ext uri="{FF2B5EF4-FFF2-40B4-BE49-F238E27FC236}">
-                <a16:creationId xmlns:a16="http://schemas.microsoft.com/office/drawing/2014/main" id="{C93EA27B-7B66-9253-2132-A986CED3A4A5}"/>
-              </a:ext>
-            </a:extLst>
-          </p:cNvPr>
-          <p:cNvSpPr>
-            <a:spLocks noGrp="1"/>
-          </p:cNvSpPr>
-          <p:nvPr>
-            <p:ph type="title"/>
-          </p:nvPr>
-        </p:nvSpPr>
-        <p:spPr>
-          <a:xfrm>
-            <a:off x="838200" y="247914"/>
-            <a:ext cx="10515600" cy="1157575"/>
-          </a:xfrm>
-        </p:spPr>
-        <p:txBody>
-          <a:bodyPr>
-            <a:normAutofit/>
-          </a:bodyPr>
-          <a:lstStyle/>
-          <a:p>
-            <a:r>
-              <a:rPr lang="en-US" sz="4000" dirty="0">
-                <a:cs typeface="Arial"/>
-              </a:rPr>
-              <a:t>Integral Anti-Windup</a:t>
-            </a:r>
-          </a:p>
-        </p:txBody>
-      </p:sp>
-      <p:sp>
-        <p:nvSpPr>
-          <p:cNvPr id="7" name="Content Placeholder 2">
-            <a:extLst>
-              <a:ext uri="{FF2B5EF4-FFF2-40B4-BE49-F238E27FC236}">
-                <a16:creationId xmlns:a16="http://schemas.microsoft.com/office/drawing/2014/main" id="{9D5747FC-6EC5-60A9-7AC8-DD5C5724A7E2}"/>
-              </a:ext>
-            </a:extLst>
-          </p:cNvPr>
-          <p:cNvSpPr>
-            <a:spLocks noGrp="1"/>
-          </p:cNvSpPr>
-          <p:nvPr>
-            <p:ph idx="1"/>
-          </p:nvPr>
-        </p:nvSpPr>
-        <p:spPr>
-          <a:xfrm>
-            <a:off x="838200" y="1579419"/>
-            <a:ext cx="10684933" cy="2257521"/>
-          </a:xfrm>
-        </p:spPr>
-        <p:txBody>
-          <a:bodyPr vert="horz" lIns="91440" tIns="45720" rIns="91440" bIns="45720" rtlCol="0" anchor="t">
-            <a:normAutofit lnSpcReduction="10000"/>
-          </a:bodyPr>
-          <a:lstStyle/>
-          <a:p>
-            <a:pPr marL="285750" indent="-285750">
-              <a:lnSpc>
-                <a:spcPct val="100000"/>
-              </a:lnSpc>
-              <a:spcBef>
-                <a:spcPts val="0"/>
-              </a:spcBef>
-              <a:spcAft>
-                <a:spcPts val="1200"/>
-              </a:spcAft>
-              <a:buFont typeface="Arial"/>
-              <a:buChar char="•"/>
-            </a:pPr>
-            <a:r>
-              <a:rPr lang="en-US" sz="2800" dirty="0">
-                <a:solidFill>
-                  <a:srgbClr val="282828"/>
-                </a:solidFill>
-                <a:latin typeface="Aptos"/>
-                <a:ea typeface="Cambria Math"/>
-                <a:cs typeface="Arial" panose="020B0604020202020204"/>
-              </a:rPr>
-              <a:t>Windup happens when the actuator saturates</a:t>
-            </a:r>
-          </a:p>
-          <a:p>
-            <a:pPr marL="285750" indent="-285750">
-              <a:lnSpc>
-                <a:spcPct val="100000"/>
-              </a:lnSpc>
-              <a:spcBef>
-                <a:spcPts val="0"/>
-              </a:spcBef>
-              <a:spcAft>
-                <a:spcPts val="1200"/>
-              </a:spcAft>
-              <a:buFont typeface="Arial"/>
-              <a:buChar char="•"/>
-            </a:pPr>
-            <a:r>
-              <a:rPr lang="en-US" sz="2800" dirty="0">
-                <a:solidFill>
-                  <a:srgbClr val="282828"/>
-                </a:solidFill>
-                <a:latin typeface="Aptos"/>
-                <a:ea typeface="Cambria Math"/>
-                <a:cs typeface="Arial" panose="020B0604020202020204"/>
-              </a:rPr>
-              <a:t>The integrator keeps accumulating error</a:t>
-            </a:r>
-          </a:p>
-          <a:p>
-            <a:pPr marL="285750" indent="-285750">
-              <a:lnSpc>
-                <a:spcPct val="100000"/>
-              </a:lnSpc>
-              <a:spcBef>
-                <a:spcPts val="0"/>
-              </a:spcBef>
-              <a:spcAft>
-                <a:spcPts val="1200"/>
-              </a:spcAft>
-              <a:buFont typeface="Arial"/>
-              <a:buChar char="•"/>
-            </a:pPr>
-            <a:r>
-              <a:rPr lang="en-US" sz="2800" dirty="0">
-                <a:solidFill>
-                  <a:srgbClr val="282828"/>
-                </a:solidFill>
-                <a:latin typeface="Aptos"/>
-                <a:ea typeface="Cambria Math"/>
-                <a:cs typeface="Arial" panose="020B0604020202020204"/>
-              </a:rPr>
-              <a:t>Recovery becomes slow and overshoot grows</a:t>
-            </a:r>
-          </a:p>
-          <a:p>
-            <a:pPr marL="285750" indent="-285750">
-              <a:lnSpc>
-                <a:spcPct val="100000"/>
-              </a:lnSpc>
-              <a:spcBef>
-                <a:spcPts val="0"/>
-              </a:spcBef>
-              <a:spcAft>
-                <a:spcPts val="1200"/>
-              </a:spcAft>
-              <a:buFont typeface="Arial"/>
-              <a:buChar char="•"/>
-            </a:pPr>
-            <a:r>
-              <a:rPr lang="en-US" sz="2800" dirty="0">
-                <a:solidFill>
-                  <a:srgbClr val="282828"/>
-                </a:solidFill>
-                <a:latin typeface="Aptos"/>
-                <a:ea typeface="Cambria Math"/>
-                <a:cs typeface="Arial" panose="020B0604020202020204"/>
-              </a:rPr>
-              <a:t>Clamp or back-calculate the integrator state</a:t>
-            </a:r>
-          </a:p>
-          <a:p>
-            <a:pPr marL="285750" indent="-285750">
-              <a:lnSpc>
-                <a:spcPct val="100000"/>
-              </a:lnSpc>
-              <a:spcBef>
-                <a:spcPts val="0"/>
-              </a:spcBef>
-              <a:spcAft>
-                <a:spcPts val="1200"/>
-              </a:spcAft>
-              <a:buFont typeface="Arial"/>
-              <a:buChar char="•"/>
-            </a:pPr>
-            <a:endParaRPr lang="en-US" sz="2800" dirty="0">
-              <a:solidFill>
-                <a:srgbClr val="282828"/>
-              </a:solidFill>
-              <a:latin typeface="Aptos"/>
-              <a:ea typeface="Cambria Math"/>
-              <a:cs typeface="Arial" panose="020B0604020202020204"/>
-            </a:endParaRPr>
-          </a:p>
-        </p:txBody>
-      </p:sp>
-    </p:spTree>
-    <p:extLst>
-      <p:ext uri="{BB962C8B-B14F-4D97-AF65-F5344CB8AC3E}">
-        <p14:creationId xmlns:p14="http://schemas.microsoft.com/office/powerpoint/2010/main" val="4038145416"/>
-      </p:ext>
-    </p:extLst>
-  </p:cSld>
-  <p:clrMapOvr>
-    <a:masterClrMapping/>
-  </p:clrMapOvr>
-</p:sld>
-</file>
-
-<file path=ppt/slides/slide11.xml><?xml version="1.0" encoding="utf-8"?>
-<p:sld xmlns:a="http://schemas.openxmlformats.org/drawingml/2006/main" xmlns:r="http://schemas.openxmlformats.org/officeDocument/2006/relationships" xmlns:p="http://schemas.openxmlformats.org/presentationml/2006/main">
-  <p:cSld>
-    <p:spTree>
-      <p:nvGrpSpPr>
-        <p:cNvPr id="1" name="">
-          <a:extLst>
-            <a:ext uri="{FF2B5EF4-FFF2-40B4-BE49-F238E27FC236}">
-              <a16:creationId xmlns:a16="http://schemas.microsoft.com/office/drawing/2014/main" id="{12C1D046-C305-404D-55CA-153D84E52850}"/>
-            </a:ext>
-          </a:extLst>
-        </p:cNvPr>
-        <p:cNvGrpSpPr/>
-        <p:nvPr/>
-      </p:nvGrpSpPr>
-      <p:grpSpPr>
-        <a:xfrm>
-          <a:off x="0" y="0"/>
-          <a:ext cx="0" cy="0"/>
-          <a:chOff x="0" y="0"/>
-          <a:chExt cx="0" cy="0"/>
-        </a:xfrm>
-      </p:grpSpPr>
-      <p:sp>
-        <p:nvSpPr>
-          <p:cNvPr id="4" name="Footer Placeholder 3">
-            <a:extLst>
-              <a:ext uri="{FF2B5EF4-FFF2-40B4-BE49-F238E27FC236}">
-                <a16:creationId xmlns:a16="http://schemas.microsoft.com/office/drawing/2014/main" id="{4747B517-9D55-3BA8-0509-E1DF11DE3F65}"/>
-              </a:ext>
-            </a:extLst>
-          </p:cNvPr>
-          <p:cNvSpPr>
-            <a:spLocks noGrp="1"/>
-          </p:cNvSpPr>
-          <p:nvPr>
-            <p:ph type="ftr" sz="quarter" idx="11"/>
-          </p:nvPr>
-        </p:nvSpPr>
-        <p:spPr/>
-        <p:txBody>
-          <a:bodyPr/>
-          <a:lstStyle/>
-          <a:p>
-            <a:r>
-              <a:rPr lang="en-US" dirty="0"/>
-              <a:t>CSSC @ </a:t>
-            </a:r>
-            <a:r>
-              <a:rPr lang="en-US" dirty="0" err="1"/>
-              <a:t>UTDallas</a:t>
-            </a:r>
-            <a:endParaRPr lang="en-US" dirty="0"/>
-          </a:p>
-        </p:txBody>
-      </p:sp>
-      <p:sp>
-        <p:nvSpPr>
-          <p:cNvPr id="5" name="Slide Number Placeholder 4">
-            <a:extLst>
-              <a:ext uri="{FF2B5EF4-FFF2-40B4-BE49-F238E27FC236}">
-                <a16:creationId xmlns:a16="http://schemas.microsoft.com/office/drawing/2014/main" id="{972B25CB-E5DE-0873-815B-D2EA04369989}"/>
-              </a:ext>
-            </a:extLst>
-          </p:cNvPr>
-          <p:cNvSpPr>
-            <a:spLocks noGrp="1"/>
-          </p:cNvSpPr>
-          <p:nvPr>
-            <p:ph type="sldNum" sz="quarter" idx="12"/>
-          </p:nvPr>
-        </p:nvSpPr>
-        <p:spPr/>
-        <p:txBody>
-          <a:bodyPr/>
-          <a:lstStyle/>
-          <a:p>
-            <a:fld id="{C68DACDF-E1A9-A04C-A5FF-FC2443684BF5}" type="slidenum">
-              <a:rPr lang="en-US" smtClean="0"/>
-              <a:pPr/>
-              <a:t>11</a:t>
-            </a:fld>
-            <a:endParaRPr lang="en-US" dirty="0"/>
-          </a:p>
-        </p:txBody>
-      </p:sp>
-      <p:sp>
-        <p:nvSpPr>
-          <p:cNvPr id="3" name="Title 1">
-            <a:extLst>
-              <a:ext uri="{FF2B5EF4-FFF2-40B4-BE49-F238E27FC236}">
-                <a16:creationId xmlns:a16="http://schemas.microsoft.com/office/drawing/2014/main" id="{BBD25163-6100-A884-CFE7-EF9CB1187FE1}"/>
-              </a:ext>
-            </a:extLst>
-          </p:cNvPr>
-          <p:cNvSpPr>
-            <a:spLocks noGrp="1"/>
-          </p:cNvSpPr>
-          <p:nvPr>
-            <p:ph type="title"/>
-          </p:nvPr>
-        </p:nvSpPr>
-        <p:spPr>
-          <a:xfrm>
-            <a:off x="838200" y="247914"/>
-            <a:ext cx="10515600" cy="1157575"/>
-          </a:xfrm>
-        </p:spPr>
-        <p:txBody>
-          <a:bodyPr>
-            <a:normAutofit/>
-          </a:bodyPr>
-          <a:lstStyle/>
-          <a:p>
-            <a:r>
-              <a:rPr lang="en-US" sz="4000" dirty="0">
-                <a:cs typeface="Arial"/>
-              </a:rPr>
-              <a:t>Back-calculation</a:t>
-            </a:r>
-            <a:endParaRPr lang="en-US" dirty="0"/>
-          </a:p>
-        </p:txBody>
-      </p:sp>
-      <p:pic>
-        <p:nvPicPr>
-          <p:cNvPr id="2" name="Picture 1" descr="Backcalculation for PID">
-            <a:extLst>
-              <a:ext uri="{FF2B5EF4-FFF2-40B4-BE49-F238E27FC236}">
-                <a16:creationId xmlns:a16="http://schemas.microsoft.com/office/drawing/2014/main" id="{BB6546EE-960C-F532-F6C5-0AE6B5E5040F}"/>
-              </a:ext>
-            </a:extLst>
-          </p:cNvPr>
-          <p:cNvPicPr>
-            <a:picLocks noChangeAspect="1"/>
-          </p:cNvPicPr>
-          <p:nvPr/>
-        </p:nvPicPr>
-        <p:blipFill>
-          <a:blip r:embed="rId3"/>
-          <a:stretch>
-            <a:fillRect/>
-          </a:stretch>
-        </p:blipFill>
-        <p:spPr>
-          <a:xfrm>
-            <a:off x="239637" y="1575556"/>
-            <a:ext cx="11811000" cy="3943350"/>
-          </a:xfrm>
-          <a:prstGeom prst="rect">
-            <a:avLst/>
-          </a:prstGeom>
-        </p:spPr>
-      </p:pic>
-    </p:spTree>
-    <p:extLst>
-      <p:ext uri="{BB962C8B-B14F-4D97-AF65-F5344CB8AC3E}">
-        <p14:creationId xmlns:p14="http://schemas.microsoft.com/office/powerpoint/2010/main" val="3805030892"/>
-      </p:ext>
-    </p:extLst>
-  </p:cSld>
-  <p:clrMapOvr>
-    <a:masterClrMapping/>
-  </p:clrMapOvr>
-</p:sld>
-</file>
-
-<file path=ppt/slides/slide12.xml><?xml version="1.0" encoding="utf-8"?>
 <p:sld xmlns:a="http://schemas.openxmlformats.org/drawingml/2006/main" xmlns:r="http://schemas.openxmlformats.org/officeDocument/2006/relationships" xmlns:p="http://schemas.openxmlformats.org/presentationml/2006/main">
   <p:cSld>
     <p:spTree>
@@ -5418,7 +5744,7 @@
             <a:fld id="{C68DACDF-E1A9-A04C-A5FF-FC2443684BF5}" type="slidenum">
               <a:rPr lang="en-US" smtClean="0"/>
               <a:pPr/>
-              <a:t>12</a:t>
+              <a:t>10</a:t>
             </a:fld>
             <a:endParaRPr lang="en-US" dirty="0"/>
           </a:p>
@@ -6388,7 +6714,870 @@
 </p:sld>
 </file>
 
+<file path=ppt/slides/slide11.xml><?xml version="1.0" encoding="utf-8"?>
+<p:sld xmlns:a="http://schemas.openxmlformats.org/drawingml/2006/main" xmlns:r="http://schemas.openxmlformats.org/officeDocument/2006/relationships" xmlns:p="http://schemas.openxmlformats.org/presentationml/2006/main">
+  <p:cSld>
+    <p:spTree>
+      <p:nvGrpSpPr>
+        <p:cNvPr id="1" name="">
+          <a:extLst>
+            <a:ext uri="{FF2B5EF4-FFF2-40B4-BE49-F238E27FC236}">
+              <a16:creationId xmlns:a16="http://schemas.microsoft.com/office/drawing/2014/main" id="{12E6D2B8-1700-B71A-8703-8CA3E6619F3A}"/>
+            </a:ext>
+          </a:extLst>
+        </p:cNvPr>
+        <p:cNvGrpSpPr/>
+        <p:nvPr/>
+      </p:nvGrpSpPr>
+      <p:grpSpPr>
+        <a:xfrm>
+          <a:off x="0" y="0"/>
+          <a:ext cx="0" cy="0"/>
+          <a:chOff x="0" y="0"/>
+          <a:chExt cx="0" cy="0"/>
+        </a:xfrm>
+      </p:grpSpPr>
+      <p:sp>
+        <p:nvSpPr>
+          <p:cNvPr id="4" name="Footer Placeholder 3">
+            <a:extLst>
+              <a:ext uri="{FF2B5EF4-FFF2-40B4-BE49-F238E27FC236}">
+                <a16:creationId xmlns:a16="http://schemas.microsoft.com/office/drawing/2014/main" id="{82ED6C0D-E6D9-F644-09D5-7A2A0046A584}"/>
+              </a:ext>
+            </a:extLst>
+          </p:cNvPr>
+          <p:cNvSpPr>
+            <a:spLocks noGrp="1"/>
+          </p:cNvSpPr>
+          <p:nvPr>
+            <p:ph type="ftr" sz="quarter" idx="11"/>
+          </p:nvPr>
+        </p:nvSpPr>
+        <p:spPr/>
+        <p:txBody>
+          <a:bodyPr/>
+          <a:lstStyle/>
+          <a:p>
+            <a:r>
+              <a:rPr lang="en-US" dirty="0"/>
+              <a:t>CSSC @ </a:t>
+            </a:r>
+            <a:r>
+              <a:rPr lang="en-US" dirty="0" err="1"/>
+              <a:t>UTDallas</a:t>
+            </a:r>
+            <a:endParaRPr lang="en-US" dirty="0"/>
+          </a:p>
+        </p:txBody>
+      </p:sp>
+      <p:sp>
+        <p:nvSpPr>
+          <p:cNvPr id="5" name="Slide Number Placeholder 4">
+            <a:extLst>
+              <a:ext uri="{FF2B5EF4-FFF2-40B4-BE49-F238E27FC236}">
+                <a16:creationId xmlns:a16="http://schemas.microsoft.com/office/drawing/2014/main" id="{5990C042-933E-4B35-B6D3-729B7559C035}"/>
+              </a:ext>
+            </a:extLst>
+          </p:cNvPr>
+          <p:cNvSpPr>
+            <a:spLocks noGrp="1"/>
+          </p:cNvSpPr>
+          <p:nvPr>
+            <p:ph type="sldNum" sz="quarter" idx="12"/>
+          </p:nvPr>
+        </p:nvSpPr>
+        <p:spPr/>
+        <p:txBody>
+          <a:bodyPr/>
+          <a:lstStyle/>
+          <a:p>
+            <a:fld id="{C68DACDF-E1A9-A04C-A5FF-FC2443684BF5}" type="slidenum">
+              <a:rPr lang="en-US" smtClean="0"/>
+              <a:pPr/>
+              <a:t>11</a:t>
+            </a:fld>
+            <a:endParaRPr lang="en-US" dirty="0"/>
+          </a:p>
+        </p:txBody>
+      </p:sp>
+      <p:sp>
+        <p:nvSpPr>
+          <p:cNvPr id="3" name="Title 1">
+            <a:extLst>
+              <a:ext uri="{FF2B5EF4-FFF2-40B4-BE49-F238E27FC236}">
+                <a16:creationId xmlns:a16="http://schemas.microsoft.com/office/drawing/2014/main" id="{5B31075F-E1A1-1D52-57DF-C8D207F690AE}"/>
+              </a:ext>
+            </a:extLst>
+          </p:cNvPr>
+          <p:cNvSpPr>
+            <a:spLocks noGrp="1"/>
+          </p:cNvSpPr>
+          <p:nvPr>
+            <p:ph type="title"/>
+          </p:nvPr>
+        </p:nvSpPr>
+        <p:spPr>
+          <a:xfrm>
+            <a:off x="838200" y="247914"/>
+            <a:ext cx="10515600" cy="1157575"/>
+          </a:xfrm>
+        </p:spPr>
+        <p:txBody>
+          <a:bodyPr>
+            <a:normAutofit/>
+          </a:bodyPr>
+          <a:lstStyle/>
+          <a:p>
+            <a:r>
+              <a:rPr lang="en-US" sz="4000" dirty="0">
+                <a:cs typeface="Arial"/>
+              </a:rPr>
+              <a:t>Ziegler-Nichols Tuning</a:t>
+            </a:r>
+            <a:endParaRPr lang="en-US" dirty="0"/>
+          </a:p>
+        </p:txBody>
+      </p:sp>
+      <p:pic>
+        <p:nvPicPr>
+          <p:cNvPr id="9" name="Picture 8">
+            <a:extLst>
+              <a:ext uri="{FF2B5EF4-FFF2-40B4-BE49-F238E27FC236}">
+                <a16:creationId xmlns:a16="http://schemas.microsoft.com/office/drawing/2014/main" id="{8ED2D277-EB68-8175-3C11-19510B0CCD98}"/>
+              </a:ext>
+            </a:extLst>
+          </p:cNvPr>
+          <p:cNvPicPr>
+            <a:picLocks noChangeAspect="1"/>
+          </p:cNvPicPr>
+          <p:nvPr/>
+        </p:nvPicPr>
+        <p:blipFill>
+          <a:blip r:embed="rId3">
+            <a:extLst>
+              <a:ext uri="{28A0092B-C50C-407E-A947-70E740481C1C}">
+                <a14:useLocalDpi xmlns:a14="http://schemas.microsoft.com/office/drawing/2010/main" val="0"/>
+              </a:ext>
+            </a:extLst>
+          </a:blip>
+          <a:srcRect t="10539"/>
+          <a:stretch>
+            <a:fillRect/>
+          </a:stretch>
+        </p:blipFill>
+        <p:spPr>
+          <a:xfrm>
+            <a:off x="1456677" y="1669119"/>
+            <a:ext cx="9278645" cy="3519762"/>
+          </a:xfrm>
+          <a:prstGeom prst="rect">
+            <a:avLst/>
+          </a:prstGeom>
+        </p:spPr>
+      </p:pic>
+    </p:spTree>
+    <p:extLst>
+      <p:ext uri="{BB962C8B-B14F-4D97-AF65-F5344CB8AC3E}">
+        <p14:creationId xmlns:p14="http://schemas.microsoft.com/office/powerpoint/2010/main" val="137169761"/>
+      </p:ext>
+    </p:extLst>
+  </p:cSld>
+  <p:clrMapOvr>
+    <a:masterClrMapping/>
+  </p:clrMapOvr>
+</p:sld>
+</file>
+
+<file path=ppt/slides/slide12.xml><?xml version="1.0" encoding="utf-8"?>
+<p:sld xmlns:a="http://schemas.openxmlformats.org/drawingml/2006/main" xmlns:r="http://schemas.openxmlformats.org/officeDocument/2006/relationships" xmlns:p="http://schemas.openxmlformats.org/presentationml/2006/main">
+  <p:cSld>
+    <p:spTree>
+      <p:nvGrpSpPr>
+        <p:cNvPr id="1" name="">
+          <a:extLst>
+            <a:ext uri="{FF2B5EF4-FFF2-40B4-BE49-F238E27FC236}">
+              <a16:creationId xmlns:a16="http://schemas.microsoft.com/office/drawing/2014/main" id="{93D29A0B-800F-7E92-EBFB-A41D83A55604}"/>
+            </a:ext>
+          </a:extLst>
+        </p:cNvPr>
+        <p:cNvGrpSpPr/>
+        <p:nvPr/>
+      </p:nvGrpSpPr>
+      <p:grpSpPr>
+        <a:xfrm>
+          <a:off x="0" y="0"/>
+          <a:ext cx="0" cy="0"/>
+          <a:chOff x="0" y="0"/>
+          <a:chExt cx="0" cy="0"/>
+        </a:xfrm>
+      </p:grpSpPr>
+      <p:sp>
+        <p:nvSpPr>
+          <p:cNvPr id="4" name="Footer Placeholder 3">
+            <a:extLst>
+              <a:ext uri="{FF2B5EF4-FFF2-40B4-BE49-F238E27FC236}">
+                <a16:creationId xmlns:a16="http://schemas.microsoft.com/office/drawing/2014/main" id="{46984DD0-DBF2-7A9C-4BA1-C4ACA2A18E96}"/>
+              </a:ext>
+            </a:extLst>
+          </p:cNvPr>
+          <p:cNvSpPr>
+            <a:spLocks noGrp="1"/>
+          </p:cNvSpPr>
+          <p:nvPr>
+            <p:ph type="ftr" sz="quarter" idx="11"/>
+          </p:nvPr>
+        </p:nvSpPr>
+        <p:spPr/>
+        <p:txBody>
+          <a:bodyPr/>
+          <a:lstStyle/>
+          <a:p>
+            <a:r>
+              <a:rPr lang="en-US" dirty="0"/>
+              <a:t>CSSC @ </a:t>
+            </a:r>
+            <a:r>
+              <a:rPr lang="en-US" dirty="0" err="1"/>
+              <a:t>UTDallas</a:t>
+            </a:r>
+            <a:endParaRPr lang="en-US" dirty="0"/>
+          </a:p>
+        </p:txBody>
+      </p:sp>
+      <p:sp>
+        <p:nvSpPr>
+          <p:cNvPr id="5" name="Slide Number Placeholder 4">
+            <a:extLst>
+              <a:ext uri="{FF2B5EF4-FFF2-40B4-BE49-F238E27FC236}">
+                <a16:creationId xmlns:a16="http://schemas.microsoft.com/office/drawing/2014/main" id="{3E3CA680-BC4F-545E-A23B-86CB0A769703}"/>
+              </a:ext>
+            </a:extLst>
+          </p:cNvPr>
+          <p:cNvSpPr>
+            <a:spLocks noGrp="1"/>
+          </p:cNvSpPr>
+          <p:nvPr>
+            <p:ph type="sldNum" sz="quarter" idx="12"/>
+          </p:nvPr>
+        </p:nvSpPr>
+        <p:spPr/>
+        <p:txBody>
+          <a:bodyPr/>
+          <a:lstStyle/>
+          <a:p>
+            <a:fld id="{C68DACDF-E1A9-A04C-A5FF-FC2443684BF5}" type="slidenum">
+              <a:rPr lang="en-US" smtClean="0"/>
+              <a:pPr/>
+              <a:t>12</a:t>
+            </a:fld>
+            <a:endParaRPr lang="en-US" dirty="0"/>
+          </a:p>
+        </p:txBody>
+      </p:sp>
+      <p:sp>
+        <p:nvSpPr>
+          <p:cNvPr id="3" name="Title 1">
+            <a:extLst>
+              <a:ext uri="{FF2B5EF4-FFF2-40B4-BE49-F238E27FC236}">
+                <a16:creationId xmlns:a16="http://schemas.microsoft.com/office/drawing/2014/main" id="{C93EA27B-7B66-9253-2132-A986CED3A4A5}"/>
+              </a:ext>
+            </a:extLst>
+          </p:cNvPr>
+          <p:cNvSpPr>
+            <a:spLocks noGrp="1"/>
+          </p:cNvSpPr>
+          <p:nvPr>
+            <p:ph type="title"/>
+          </p:nvPr>
+        </p:nvSpPr>
+        <p:spPr>
+          <a:xfrm>
+            <a:off x="838200" y="247914"/>
+            <a:ext cx="10515600" cy="1157575"/>
+          </a:xfrm>
+        </p:spPr>
+        <p:txBody>
+          <a:bodyPr>
+            <a:normAutofit/>
+          </a:bodyPr>
+          <a:lstStyle/>
+          <a:p>
+            <a:r>
+              <a:rPr lang="en-US" sz="4000" dirty="0">
+                <a:cs typeface="Arial"/>
+              </a:rPr>
+              <a:t>Integral Anti-Windup</a:t>
+            </a:r>
+          </a:p>
+        </p:txBody>
+      </p:sp>
+      <p:sp>
+        <p:nvSpPr>
+          <p:cNvPr id="7" name="Content Placeholder 2">
+            <a:extLst>
+              <a:ext uri="{FF2B5EF4-FFF2-40B4-BE49-F238E27FC236}">
+                <a16:creationId xmlns:a16="http://schemas.microsoft.com/office/drawing/2014/main" id="{9D5747FC-6EC5-60A9-7AC8-DD5C5724A7E2}"/>
+              </a:ext>
+            </a:extLst>
+          </p:cNvPr>
+          <p:cNvSpPr>
+            <a:spLocks noGrp="1"/>
+          </p:cNvSpPr>
+          <p:nvPr>
+            <p:ph idx="1"/>
+          </p:nvPr>
+        </p:nvSpPr>
+        <p:spPr>
+          <a:xfrm>
+            <a:off x="838200" y="1579419"/>
+            <a:ext cx="10684933" cy="2257521"/>
+          </a:xfrm>
+        </p:spPr>
+        <p:txBody>
+          <a:bodyPr vert="horz" lIns="91440" tIns="45720" rIns="91440" bIns="45720" rtlCol="0" anchor="t">
+            <a:normAutofit lnSpcReduction="10000"/>
+          </a:bodyPr>
+          <a:lstStyle/>
+          <a:p>
+            <a:pPr marL="285750" indent="-285750">
+              <a:lnSpc>
+                <a:spcPct val="100000"/>
+              </a:lnSpc>
+              <a:spcBef>
+                <a:spcPts val="0"/>
+              </a:spcBef>
+              <a:spcAft>
+                <a:spcPts val="1200"/>
+              </a:spcAft>
+              <a:buFont typeface="Arial"/>
+              <a:buChar char="•"/>
+            </a:pPr>
+            <a:r>
+              <a:rPr lang="en-US" sz="2800" dirty="0">
+                <a:solidFill>
+                  <a:srgbClr val="282828"/>
+                </a:solidFill>
+                <a:latin typeface="Aptos"/>
+                <a:ea typeface="Cambria Math"/>
+                <a:cs typeface="Arial" panose="020B0604020202020204"/>
+              </a:rPr>
+              <a:t>Windup happens when the actuator saturates</a:t>
+            </a:r>
+          </a:p>
+          <a:p>
+            <a:pPr marL="285750" indent="-285750">
+              <a:lnSpc>
+                <a:spcPct val="100000"/>
+              </a:lnSpc>
+              <a:spcBef>
+                <a:spcPts val="0"/>
+              </a:spcBef>
+              <a:spcAft>
+                <a:spcPts val="1200"/>
+              </a:spcAft>
+              <a:buFont typeface="Arial"/>
+              <a:buChar char="•"/>
+            </a:pPr>
+            <a:r>
+              <a:rPr lang="en-US" sz="2800" dirty="0">
+                <a:solidFill>
+                  <a:srgbClr val="282828"/>
+                </a:solidFill>
+                <a:latin typeface="Aptos"/>
+                <a:ea typeface="Cambria Math"/>
+                <a:cs typeface="Arial" panose="020B0604020202020204"/>
+              </a:rPr>
+              <a:t>The integrator keeps accumulating error</a:t>
+            </a:r>
+          </a:p>
+          <a:p>
+            <a:pPr marL="285750" indent="-285750">
+              <a:lnSpc>
+                <a:spcPct val="100000"/>
+              </a:lnSpc>
+              <a:spcBef>
+                <a:spcPts val="0"/>
+              </a:spcBef>
+              <a:spcAft>
+                <a:spcPts val="1200"/>
+              </a:spcAft>
+              <a:buFont typeface="Arial"/>
+              <a:buChar char="•"/>
+            </a:pPr>
+            <a:r>
+              <a:rPr lang="en-US" sz="2800" dirty="0">
+                <a:solidFill>
+                  <a:srgbClr val="282828"/>
+                </a:solidFill>
+                <a:latin typeface="Aptos"/>
+                <a:ea typeface="Cambria Math"/>
+                <a:cs typeface="Arial" panose="020B0604020202020204"/>
+              </a:rPr>
+              <a:t>Recovery becomes slow and overshoot grows</a:t>
+            </a:r>
+          </a:p>
+          <a:p>
+            <a:pPr marL="285750" indent="-285750">
+              <a:lnSpc>
+                <a:spcPct val="100000"/>
+              </a:lnSpc>
+              <a:spcBef>
+                <a:spcPts val="0"/>
+              </a:spcBef>
+              <a:spcAft>
+                <a:spcPts val="1200"/>
+              </a:spcAft>
+              <a:buFont typeface="Arial"/>
+              <a:buChar char="•"/>
+            </a:pPr>
+            <a:r>
+              <a:rPr lang="en-US" sz="2800" dirty="0">
+                <a:solidFill>
+                  <a:srgbClr val="282828"/>
+                </a:solidFill>
+                <a:latin typeface="Aptos"/>
+                <a:ea typeface="Cambria Math"/>
+                <a:cs typeface="Arial" panose="020B0604020202020204"/>
+              </a:rPr>
+              <a:t>Clamp or back-calculate the integrator state</a:t>
+            </a:r>
+          </a:p>
+          <a:p>
+            <a:pPr marL="285750" indent="-285750">
+              <a:lnSpc>
+                <a:spcPct val="100000"/>
+              </a:lnSpc>
+              <a:spcBef>
+                <a:spcPts val="0"/>
+              </a:spcBef>
+              <a:spcAft>
+                <a:spcPts val="1200"/>
+              </a:spcAft>
+              <a:buFont typeface="Arial"/>
+              <a:buChar char="•"/>
+            </a:pPr>
+            <a:endParaRPr lang="en-US" sz="2800" dirty="0">
+              <a:solidFill>
+                <a:srgbClr val="282828"/>
+              </a:solidFill>
+              <a:latin typeface="Aptos"/>
+              <a:ea typeface="Cambria Math"/>
+              <a:cs typeface="Arial" panose="020B0604020202020204"/>
+            </a:endParaRPr>
+          </a:p>
+        </p:txBody>
+      </p:sp>
+    </p:spTree>
+    <p:extLst>
+      <p:ext uri="{BB962C8B-B14F-4D97-AF65-F5344CB8AC3E}">
+        <p14:creationId xmlns:p14="http://schemas.microsoft.com/office/powerpoint/2010/main" val="4038145416"/>
+      </p:ext>
+    </p:extLst>
+  </p:cSld>
+  <p:clrMapOvr>
+    <a:masterClrMapping/>
+  </p:clrMapOvr>
+</p:sld>
+</file>
+
 <file path=ppt/slides/slide13.xml><?xml version="1.0" encoding="utf-8"?>
+<p:sld xmlns:a="http://schemas.openxmlformats.org/drawingml/2006/main" xmlns:r="http://schemas.openxmlformats.org/officeDocument/2006/relationships" xmlns:p="http://schemas.openxmlformats.org/presentationml/2006/main">
+  <p:cSld>
+    <p:spTree>
+      <p:nvGrpSpPr>
+        <p:cNvPr id="1" name="">
+          <a:extLst>
+            <a:ext uri="{FF2B5EF4-FFF2-40B4-BE49-F238E27FC236}">
+              <a16:creationId xmlns:a16="http://schemas.microsoft.com/office/drawing/2014/main" id="{8111EC9D-A0D5-56A2-F131-1A45AC0B5DAE}"/>
+            </a:ext>
+          </a:extLst>
+        </p:cNvPr>
+        <p:cNvGrpSpPr/>
+        <p:nvPr/>
+      </p:nvGrpSpPr>
+      <p:grpSpPr>
+        <a:xfrm>
+          <a:off x="0" y="0"/>
+          <a:ext cx="0" cy="0"/>
+          <a:chOff x="0" y="0"/>
+          <a:chExt cx="0" cy="0"/>
+        </a:xfrm>
+      </p:grpSpPr>
+      <p:sp>
+        <p:nvSpPr>
+          <p:cNvPr id="4" name="Footer Placeholder 3">
+            <a:extLst>
+              <a:ext uri="{FF2B5EF4-FFF2-40B4-BE49-F238E27FC236}">
+                <a16:creationId xmlns:a16="http://schemas.microsoft.com/office/drawing/2014/main" id="{5D90369B-3278-8DF8-5E5A-08C003952CBF}"/>
+              </a:ext>
+            </a:extLst>
+          </p:cNvPr>
+          <p:cNvSpPr>
+            <a:spLocks noGrp="1"/>
+          </p:cNvSpPr>
+          <p:nvPr>
+            <p:ph type="ftr" sz="quarter" idx="11"/>
+          </p:nvPr>
+        </p:nvSpPr>
+        <p:spPr/>
+        <p:txBody>
+          <a:bodyPr/>
+          <a:lstStyle/>
+          <a:p>
+            <a:r>
+              <a:rPr lang="en-US" dirty="0"/>
+              <a:t>CSSC @ </a:t>
+            </a:r>
+            <a:r>
+              <a:rPr lang="en-US" dirty="0" err="1"/>
+              <a:t>UTDallas</a:t>
+            </a:r>
+            <a:endParaRPr lang="en-US" dirty="0"/>
+          </a:p>
+        </p:txBody>
+      </p:sp>
+      <p:sp>
+        <p:nvSpPr>
+          <p:cNvPr id="5" name="Slide Number Placeholder 4">
+            <a:extLst>
+              <a:ext uri="{FF2B5EF4-FFF2-40B4-BE49-F238E27FC236}">
+                <a16:creationId xmlns:a16="http://schemas.microsoft.com/office/drawing/2014/main" id="{97529241-AB3D-CDE0-CC72-348E28868C38}"/>
+              </a:ext>
+            </a:extLst>
+          </p:cNvPr>
+          <p:cNvSpPr>
+            <a:spLocks noGrp="1"/>
+          </p:cNvSpPr>
+          <p:nvPr>
+            <p:ph type="sldNum" sz="quarter" idx="12"/>
+          </p:nvPr>
+        </p:nvSpPr>
+        <p:spPr/>
+        <p:txBody>
+          <a:bodyPr/>
+          <a:lstStyle/>
+          <a:p>
+            <a:fld id="{C68DACDF-E1A9-A04C-A5FF-FC2443684BF5}" type="slidenum">
+              <a:rPr lang="en-US" smtClean="0"/>
+              <a:pPr/>
+              <a:t>13</a:t>
+            </a:fld>
+            <a:endParaRPr lang="en-US" dirty="0"/>
+          </a:p>
+        </p:txBody>
+      </p:sp>
+      <p:sp>
+        <p:nvSpPr>
+          <p:cNvPr id="3" name="Title 1">
+            <a:extLst>
+              <a:ext uri="{FF2B5EF4-FFF2-40B4-BE49-F238E27FC236}">
+                <a16:creationId xmlns:a16="http://schemas.microsoft.com/office/drawing/2014/main" id="{ED2CF0FD-F4C7-9DC0-1EEC-A8BC2A64DA70}"/>
+              </a:ext>
+            </a:extLst>
+          </p:cNvPr>
+          <p:cNvSpPr>
+            <a:spLocks noGrp="1"/>
+          </p:cNvSpPr>
+          <p:nvPr>
+            <p:ph type="title"/>
+          </p:nvPr>
+        </p:nvSpPr>
+        <p:spPr>
+          <a:xfrm>
+            <a:off x="838200" y="247914"/>
+            <a:ext cx="10515600" cy="1157575"/>
+          </a:xfrm>
+        </p:spPr>
+        <p:txBody>
+          <a:bodyPr>
+            <a:normAutofit/>
+          </a:bodyPr>
+          <a:lstStyle/>
+          <a:p>
+            <a:r>
+              <a:rPr lang="en-US" sz="4000" dirty="0">
+                <a:cs typeface="Arial"/>
+              </a:rPr>
+              <a:t>Integral Anti-Windup</a:t>
+            </a:r>
+          </a:p>
+        </p:txBody>
+      </p:sp>
+      <p:pic>
+        <p:nvPicPr>
+          <p:cNvPr id="9" name="Picture 8">
+            <a:extLst>
+              <a:ext uri="{FF2B5EF4-FFF2-40B4-BE49-F238E27FC236}">
+                <a16:creationId xmlns:a16="http://schemas.microsoft.com/office/drawing/2014/main" id="{EEE9A9AD-F12A-0C68-8344-1EB00871D114}"/>
+              </a:ext>
+            </a:extLst>
+          </p:cNvPr>
+          <p:cNvPicPr>
+            <a:picLocks noChangeAspect="1"/>
+          </p:cNvPicPr>
+          <p:nvPr/>
+        </p:nvPicPr>
+        <p:blipFill>
+          <a:blip r:embed="rId3"/>
+          <a:stretch>
+            <a:fillRect/>
+          </a:stretch>
+        </p:blipFill>
+        <p:spPr>
+          <a:xfrm>
+            <a:off x="6605161" y="1113945"/>
+            <a:ext cx="4748639" cy="4630108"/>
+          </a:xfrm>
+          <a:prstGeom prst="rect">
+            <a:avLst/>
+          </a:prstGeom>
+        </p:spPr>
+      </p:pic>
+      <p:pic>
+        <p:nvPicPr>
+          <p:cNvPr id="2050" name="Picture 2">
+            <a:extLst>
+              <a:ext uri="{FF2B5EF4-FFF2-40B4-BE49-F238E27FC236}">
+                <a16:creationId xmlns:a16="http://schemas.microsoft.com/office/drawing/2014/main" id="{1F3B57D6-73A1-BCED-4106-447559F1777E}"/>
+              </a:ext>
+            </a:extLst>
+          </p:cNvPr>
+          <p:cNvPicPr>
+            <a:picLocks noChangeAspect="1" noChangeArrowheads="1"/>
+          </p:cNvPicPr>
+          <p:nvPr/>
+        </p:nvPicPr>
+        <p:blipFill>
+          <a:blip r:embed="rId4">
+            <a:extLst>
+              <a:ext uri="{28A0092B-C50C-407E-A947-70E740481C1C}">
+                <a14:useLocalDpi xmlns:a14="http://schemas.microsoft.com/office/drawing/2010/main" val="0"/>
+              </a:ext>
+            </a:extLst>
+          </a:blip>
+          <a:srcRect/>
+          <a:stretch>
+            <a:fillRect/>
+          </a:stretch>
+        </p:blipFill>
+        <p:spPr bwMode="auto">
+          <a:xfrm>
+            <a:off x="349831" y="1985962"/>
+            <a:ext cx="5200650" cy="2886075"/>
+          </a:xfrm>
+          <a:prstGeom prst="rect">
+            <a:avLst/>
+          </a:prstGeom>
+          <a:noFill/>
+          <a:extLst>
+            <a:ext uri="{909E8E84-426E-40DD-AFC4-6F175D3DCCD1}">
+              <a14:hiddenFill xmlns:a14="http://schemas.microsoft.com/office/drawing/2010/main">
+                <a:solidFill>
+                  <a:srgbClr val="FFFFFF"/>
+                </a:solidFill>
+              </a14:hiddenFill>
+            </a:ext>
+          </a:extLst>
+        </p:spPr>
+      </p:pic>
+    </p:spTree>
+    <p:extLst>
+      <p:ext uri="{BB962C8B-B14F-4D97-AF65-F5344CB8AC3E}">
+        <p14:creationId xmlns:p14="http://schemas.microsoft.com/office/powerpoint/2010/main" val="90101322"/>
+      </p:ext>
+    </p:extLst>
+  </p:cSld>
+  <p:clrMapOvr>
+    <a:masterClrMapping/>
+  </p:clrMapOvr>
+</p:sld>
+</file>
+
+<file path=ppt/slides/slide14.xml><?xml version="1.0" encoding="utf-8"?>
+<p:sld xmlns:a="http://schemas.openxmlformats.org/drawingml/2006/main" xmlns:r="http://schemas.openxmlformats.org/officeDocument/2006/relationships" xmlns:p="http://schemas.openxmlformats.org/presentationml/2006/main">
+  <p:cSld>
+    <p:spTree>
+      <p:nvGrpSpPr>
+        <p:cNvPr id="1" name="">
+          <a:extLst>
+            <a:ext uri="{FF2B5EF4-FFF2-40B4-BE49-F238E27FC236}">
+              <a16:creationId xmlns:a16="http://schemas.microsoft.com/office/drawing/2014/main" id="{12C1D046-C305-404D-55CA-153D84E52850}"/>
+            </a:ext>
+          </a:extLst>
+        </p:cNvPr>
+        <p:cNvGrpSpPr/>
+        <p:nvPr/>
+      </p:nvGrpSpPr>
+      <p:grpSpPr>
+        <a:xfrm>
+          <a:off x="0" y="0"/>
+          <a:ext cx="0" cy="0"/>
+          <a:chOff x="0" y="0"/>
+          <a:chExt cx="0" cy="0"/>
+        </a:xfrm>
+      </p:grpSpPr>
+      <p:sp>
+        <p:nvSpPr>
+          <p:cNvPr id="4" name="Footer Placeholder 3">
+            <a:extLst>
+              <a:ext uri="{FF2B5EF4-FFF2-40B4-BE49-F238E27FC236}">
+                <a16:creationId xmlns:a16="http://schemas.microsoft.com/office/drawing/2014/main" id="{4747B517-9D55-3BA8-0509-E1DF11DE3F65}"/>
+              </a:ext>
+            </a:extLst>
+          </p:cNvPr>
+          <p:cNvSpPr>
+            <a:spLocks noGrp="1"/>
+          </p:cNvSpPr>
+          <p:nvPr>
+            <p:ph type="ftr" sz="quarter" idx="11"/>
+          </p:nvPr>
+        </p:nvSpPr>
+        <p:spPr/>
+        <p:txBody>
+          <a:bodyPr/>
+          <a:lstStyle/>
+          <a:p>
+            <a:r>
+              <a:rPr lang="en-US" dirty="0"/>
+              <a:t>CSSC @ </a:t>
+            </a:r>
+            <a:r>
+              <a:rPr lang="en-US" dirty="0" err="1"/>
+              <a:t>UTDallas</a:t>
+            </a:r>
+            <a:endParaRPr lang="en-US" dirty="0"/>
+          </a:p>
+        </p:txBody>
+      </p:sp>
+      <p:sp>
+        <p:nvSpPr>
+          <p:cNvPr id="5" name="Slide Number Placeholder 4">
+            <a:extLst>
+              <a:ext uri="{FF2B5EF4-FFF2-40B4-BE49-F238E27FC236}">
+                <a16:creationId xmlns:a16="http://schemas.microsoft.com/office/drawing/2014/main" id="{972B25CB-E5DE-0873-815B-D2EA04369989}"/>
+              </a:ext>
+            </a:extLst>
+          </p:cNvPr>
+          <p:cNvSpPr>
+            <a:spLocks noGrp="1"/>
+          </p:cNvSpPr>
+          <p:nvPr>
+            <p:ph type="sldNum" sz="quarter" idx="12"/>
+          </p:nvPr>
+        </p:nvSpPr>
+        <p:spPr/>
+        <p:txBody>
+          <a:bodyPr/>
+          <a:lstStyle/>
+          <a:p>
+            <a:fld id="{C68DACDF-E1A9-A04C-A5FF-FC2443684BF5}" type="slidenum">
+              <a:rPr lang="en-US" smtClean="0"/>
+              <a:pPr/>
+              <a:t>14</a:t>
+            </a:fld>
+            <a:endParaRPr lang="en-US" dirty="0"/>
+          </a:p>
+        </p:txBody>
+      </p:sp>
+      <p:sp>
+        <p:nvSpPr>
+          <p:cNvPr id="3" name="Title 1">
+            <a:extLst>
+              <a:ext uri="{FF2B5EF4-FFF2-40B4-BE49-F238E27FC236}">
+                <a16:creationId xmlns:a16="http://schemas.microsoft.com/office/drawing/2014/main" id="{BBD25163-6100-A884-CFE7-EF9CB1187FE1}"/>
+              </a:ext>
+            </a:extLst>
+          </p:cNvPr>
+          <p:cNvSpPr>
+            <a:spLocks noGrp="1"/>
+          </p:cNvSpPr>
+          <p:nvPr>
+            <p:ph type="title"/>
+          </p:nvPr>
+        </p:nvSpPr>
+        <p:spPr>
+          <a:xfrm>
+            <a:off x="838200" y="247914"/>
+            <a:ext cx="10515600" cy="1157575"/>
+          </a:xfrm>
+        </p:spPr>
+        <p:txBody>
+          <a:bodyPr>
+            <a:normAutofit/>
+          </a:bodyPr>
+          <a:lstStyle/>
+          <a:p>
+            <a:r>
+              <a:rPr lang="en-US" sz="4000" dirty="0">
+                <a:cs typeface="Arial"/>
+              </a:rPr>
+              <a:t>Back-calculation</a:t>
+            </a:r>
+            <a:endParaRPr lang="en-US" dirty="0"/>
+          </a:p>
+        </p:txBody>
+      </p:sp>
+      <p:pic>
+        <p:nvPicPr>
+          <p:cNvPr id="4098" name="Picture 2">
+            <a:extLst>
+              <a:ext uri="{FF2B5EF4-FFF2-40B4-BE49-F238E27FC236}">
+                <a16:creationId xmlns:a16="http://schemas.microsoft.com/office/drawing/2014/main" id="{5F9ACD89-C9D3-FE72-92A8-E449F8185D48}"/>
+              </a:ext>
+            </a:extLst>
+          </p:cNvPr>
+          <p:cNvPicPr>
+            <a:picLocks noChangeAspect="1" noChangeArrowheads="1"/>
+          </p:cNvPicPr>
+          <p:nvPr/>
+        </p:nvPicPr>
+        <p:blipFill>
+          <a:blip r:embed="rId3">
+            <a:extLst>
+              <a:ext uri="{28A0092B-C50C-407E-A947-70E740481C1C}">
+                <a14:useLocalDpi xmlns:a14="http://schemas.microsoft.com/office/drawing/2010/main" val="0"/>
+              </a:ext>
+            </a:extLst>
+          </a:blip>
+          <a:srcRect/>
+          <a:stretch>
+            <a:fillRect/>
+          </a:stretch>
+        </p:blipFill>
+        <p:spPr bwMode="auto">
+          <a:xfrm>
+            <a:off x="1273100" y="1450181"/>
+            <a:ext cx="9645800" cy="3957637"/>
+          </a:xfrm>
+          <a:prstGeom prst="rect">
+            <a:avLst/>
+          </a:prstGeom>
+          <a:noFill/>
+          <a:extLst>
+            <a:ext uri="{909E8E84-426E-40DD-AFC4-6F175D3DCCD1}">
+              <a14:hiddenFill xmlns:a14="http://schemas.microsoft.com/office/drawing/2010/main">
+                <a:solidFill>
+                  <a:srgbClr val="FFFFFF"/>
+                </a:solidFill>
+              </a14:hiddenFill>
+            </a:ext>
+          </a:extLst>
+        </p:spPr>
+      </p:pic>
+    </p:spTree>
+    <p:extLst>
+      <p:ext uri="{BB962C8B-B14F-4D97-AF65-F5344CB8AC3E}">
+        <p14:creationId xmlns:p14="http://schemas.microsoft.com/office/powerpoint/2010/main" val="3805030892"/>
+      </p:ext>
+    </p:extLst>
+  </p:cSld>
+  <p:clrMapOvr>
+    <a:masterClrMapping/>
+  </p:clrMapOvr>
+</p:sld>
+</file>
+
+<file path=ppt/slides/slide15.xml><?xml version="1.0" encoding="utf-8"?>
 <p:sld xmlns:a="http://schemas.openxmlformats.org/drawingml/2006/main" xmlns:r="http://schemas.openxmlformats.org/officeDocument/2006/relationships" xmlns:p="http://schemas.openxmlformats.org/presentationml/2006/main">
   <p:cSld>
     <p:spTree>
@@ -6468,7 +7657,7 @@
             <a:fld id="{C68DACDF-E1A9-A04C-A5FF-FC2443684BF5}" type="slidenum">
               <a:rPr lang="en-US" smtClean="0"/>
               <a:pPr/>
-              <a:t>13</a:t>
+              <a:t>15</a:t>
             </a:fld>
             <a:endParaRPr lang="en-US" dirty="0"/>
           </a:p>
@@ -6587,7 +7776,7 @@
                 <a:ea typeface="Cambria Math"/>
                 <a:cs typeface="Arial" panose="020B0604020202020204"/>
               </a:rPr>
-              <a:t>Schedule gains using speed, load, angle, or flow</a:t>
+              <a:t>Schedule gains using various sensor measurements</a:t>
             </a:r>
           </a:p>
           <a:p>
@@ -6657,7 +7846,456 @@
 </p:sld>
 </file>
 
-<file path=ppt/slides/slide14.xml><?xml version="1.0" encoding="utf-8"?>
+<file path=ppt/slides/slide16.xml><?xml version="1.0" encoding="utf-8"?>
+<p:sld xmlns:a="http://schemas.openxmlformats.org/drawingml/2006/main" xmlns:r="http://schemas.openxmlformats.org/officeDocument/2006/relationships" xmlns:p="http://schemas.openxmlformats.org/presentationml/2006/main">
+  <p:cSld>
+    <p:spTree>
+      <p:nvGrpSpPr>
+        <p:cNvPr id="1" name="">
+          <a:extLst>
+            <a:ext uri="{FF2B5EF4-FFF2-40B4-BE49-F238E27FC236}">
+              <a16:creationId xmlns:a16="http://schemas.microsoft.com/office/drawing/2014/main" id="{47481E36-12A1-B947-0DA2-5C9FD73E8158}"/>
+            </a:ext>
+          </a:extLst>
+        </p:cNvPr>
+        <p:cNvGrpSpPr/>
+        <p:nvPr/>
+      </p:nvGrpSpPr>
+      <p:grpSpPr>
+        <a:xfrm>
+          <a:off x="0" y="0"/>
+          <a:ext cx="0" cy="0"/>
+          <a:chOff x="0" y="0"/>
+          <a:chExt cx="0" cy="0"/>
+        </a:xfrm>
+      </p:grpSpPr>
+      <p:sp>
+        <p:nvSpPr>
+          <p:cNvPr id="4" name="Footer Placeholder 3">
+            <a:extLst>
+              <a:ext uri="{FF2B5EF4-FFF2-40B4-BE49-F238E27FC236}">
+                <a16:creationId xmlns:a16="http://schemas.microsoft.com/office/drawing/2014/main" id="{51430BF8-C834-4CD6-CE89-16814DFF25F8}"/>
+              </a:ext>
+            </a:extLst>
+          </p:cNvPr>
+          <p:cNvSpPr>
+            <a:spLocks noGrp="1"/>
+          </p:cNvSpPr>
+          <p:nvPr>
+            <p:ph type="ftr" sz="quarter" idx="11"/>
+          </p:nvPr>
+        </p:nvSpPr>
+        <p:spPr/>
+        <p:txBody>
+          <a:bodyPr/>
+          <a:lstStyle/>
+          <a:p>
+            <a:r>
+              <a:rPr lang="en-US" dirty="0"/>
+              <a:t>CSSC @ </a:t>
+            </a:r>
+            <a:r>
+              <a:rPr lang="en-US" dirty="0" err="1"/>
+              <a:t>UTDallas</a:t>
+            </a:r>
+            <a:endParaRPr lang="en-US" dirty="0"/>
+          </a:p>
+        </p:txBody>
+      </p:sp>
+      <p:sp>
+        <p:nvSpPr>
+          <p:cNvPr id="5" name="Slide Number Placeholder 4">
+            <a:extLst>
+              <a:ext uri="{FF2B5EF4-FFF2-40B4-BE49-F238E27FC236}">
+                <a16:creationId xmlns:a16="http://schemas.microsoft.com/office/drawing/2014/main" id="{51654EC2-C1AC-1FA9-7DB4-2489EFB79CF4}"/>
+              </a:ext>
+            </a:extLst>
+          </p:cNvPr>
+          <p:cNvSpPr>
+            <a:spLocks noGrp="1"/>
+          </p:cNvSpPr>
+          <p:nvPr>
+            <p:ph type="sldNum" sz="quarter" idx="12"/>
+          </p:nvPr>
+        </p:nvSpPr>
+        <p:spPr/>
+        <p:txBody>
+          <a:bodyPr/>
+          <a:lstStyle/>
+          <a:p>
+            <a:fld id="{C68DACDF-E1A9-A04C-A5FF-FC2443684BF5}" type="slidenum">
+              <a:rPr lang="en-US" smtClean="0"/>
+              <a:pPr/>
+              <a:t>16</a:t>
+            </a:fld>
+            <a:endParaRPr lang="en-US" dirty="0"/>
+          </a:p>
+        </p:txBody>
+      </p:sp>
+      <p:sp>
+        <p:nvSpPr>
+          <p:cNvPr id="3" name="Title 1">
+            <a:extLst>
+              <a:ext uri="{FF2B5EF4-FFF2-40B4-BE49-F238E27FC236}">
+                <a16:creationId xmlns:a16="http://schemas.microsoft.com/office/drawing/2014/main" id="{AD8F47F2-3D3D-1EF4-C593-538E8C1582DF}"/>
+              </a:ext>
+            </a:extLst>
+          </p:cNvPr>
+          <p:cNvSpPr>
+            <a:spLocks noGrp="1"/>
+          </p:cNvSpPr>
+          <p:nvPr>
+            <p:ph type="title"/>
+          </p:nvPr>
+        </p:nvSpPr>
+        <p:spPr>
+          <a:xfrm>
+            <a:off x="838200" y="247914"/>
+            <a:ext cx="10515600" cy="1157575"/>
+          </a:xfrm>
+        </p:spPr>
+        <p:txBody>
+          <a:bodyPr>
+            <a:normAutofit/>
+          </a:bodyPr>
+          <a:lstStyle/>
+          <a:p>
+            <a:r>
+              <a:rPr lang="en-US" sz="4000" dirty="0">
+                <a:cs typeface="Arial"/>
+              </a:rPr>
+              <a:t>Gain Scheduling</a:t>
+            </a:r>
+          </a:p>
+        </p:txBody>
+      </p:sp>
+      <p:pic>
+        <p:nvPicPr>
+          <p:cNvPr id="6148" name="Picture 4" descr="A tiltrotor in helicopter and airplane mode">
+            <a:extLst>
+              <a:ext uri="{FF2B5EF4-FFF2-40B4-BE49-F238E27FC236}">
+                <a16:creationId xmlns:a16="http://schemas.microsoft.com/office/drawing/2014/main" id="{A1A002DC-214B-277A-F812-B3CFBF929763}"/>
+              </a:ext>
+            </a:extLst>
+          </p:cNvPr>
+          <p:cNvPicPr>
+            <a:picLocks noChangeAspect="1" noChangeArrowheads="1"/>
+          </p:cNvPicPr>
+          <p:nvPr/>
+        </p:nvPicPr>
+        <p:blipFill>
+          <a:blip r:embed="rId3">
+            <a:extLst>
+              <a:ext uri="{28A0092B-C50C-407E-A947-70E740481C1C}">
+                <a14:useLocalDpi xmlns:a14="http://schemas.microsoft.com/office/drawing/2010/main" val="0"/>
+              </a:ext>
+            </a:extLst>
+          </a:blip>
+          <a:srcRect/>
+          <a:stretch>
+            <a:fillRect/>
+          </a:stretch>
+        </p:blipFill>
+        <p:spPr bwMode="auto">
+          <a:xfrm>
+            <a:off x="480060" y="1259456"/>
+            <a:ext cx="6118113" cy="4728941"/>
+          </a:xfrm>
+          <a:prstGeom prst="rect">
+            <a:avLst/>
+          </a:prstGeom>
+          <a:noFill/>
+          <a:extLst>
+            <a:ext uri="{909E8E84-426E-40DD-AFC4-6F175D3DCCD1}">
+              <a14:hiddenFill xmlns:a14="http://schemas.microsoft.com/office/drawing/2010/main">
+                <a:solidFill>
+                  <a:srgbClr val="FFFFFF"/>
+                </a:solidFill>
+              </a14:hiddenFill>
+            </a:ext>
+          </a:extLst>
+        </p:spPr>
+      </p:pic>
+      <p:pic>
+        <p:nvPicPr>
+          <p:cNvPr id="9" name="Picture 8">
+            <a:extLst>
+              <a:ext uri="{FF2B5EF4-FFF2-40B4-BE49-F238E27FC236}">
+                <a16:creationId xmlns:a16="http://schemas.microsoft.com/office/drawing/2014/main" id="{31454048-DEB6-2F57-9DDE-C25FED25DE3B}"/>
+              </a:ext>
+            </a:extLst>
+          </p:cNvPr>
+          <p:cNvPicPr>
+            <a:picLocks noChangeAspect="1"/>
+          </p:cNvPicPr>
+          <p:nvPr/>
+        </p:nvPicPr>
+        <p:blipFill>
+          <a:blip r:embed="rId4" cstate="print">
+            <a:extLst>
+              <a:ext uri="{28A0092B-C50C-407E-A947-70E740481C1C}">
+                <a14:useLocalDpi xmlns:a14="http://schemas.microsoft.com/office/drawing/2010/main" val="0"/>
+              </a:ext>
+            </a:extLst>
+          </a:blip>
+          <a:stretch>
+            <a:fillRect/>
+          </a:stretch>
+        </p:blipFill>
+        <p:spPr>
+          <a:xfrm>
+            <a:off x="6598173" y="1959176"/>
+            <a:ext cx="5436527" cy="3329500"/>
+          </a:xfrm>
+          <a:prstGeom prst="rect">
+            <a:avLst/>
+          </a:prstGeom>
+        </p:spPr>
+      </p:pic>
+    </p:spTree>
+    <p:extLst>
+      <p:ext uri="{BB962C8B-B14F-4D97-AF65-F5344CB8AC3E}">
+        <p14:creationId xmlns:p14="http://schemas.microsoft.com/office/powerpoint/2010/main" val="1879515637"/>
+      </p:ext>
+    </p:extLst>
+  </p:cSld>
+  <p:clrMapOvr>
+    <a:masterClrMapping/>
+  </p:clrMapOvr>
+</p:sld>
+</file>
+
+<file path=ppt/slides/slide17.xml><?xml version="1.0" encoding="utf-8"?>
+<p:sld xmlns:a="http://schemas.openxmlformats.org/drawingml/2006/main" xmlns:r="http://schemas.openxmlformats.org/officeDocument/2006/relationships" xmlns:p="http://schemas.openxmlformats.org/presentationml/2006/main">
+  <p:cSld>
+    <p:spTree>
+      <p:nvGrpSpPr>
+        <p:cNvPr id="1" name="">
+          <a:extLst>
+            <a:ext uri="{FF2B5EF4-FFF2-40B4-BE49-F238E27FC236}">
+              <a16:creationId xmlns:a16="http://schemas.microsoft.com/office/drawing/2014/main" id="{A80AECEB-8D19-EB0D-B3BC-D7DDD99BCD1A}"/>
+            </a:ext>
+          </a:extLst>
+        </p:cNvPr>
+        <p:cNvGrpSpPr/>
+        <p:nvPr/>
+      </p:nvGrpSpPr>
+      <p:grpSpPr>
+        <a:xfrm>
+          <a:off x="0" y="0"/>
+          <a:ext cx="0" cy="0"/>
+          <a:chOff x="0" y="0"/>
+          <a:chExt cx="0" cy="0"/>
+        </a:xfrm>
+      </p:grpSpPr>
+      <p:sp>
+        <p:nvSpPr>
+          <p:cNvPr id="4" name="Footer Placeholder 3">
+            <a:extLst>
+              <a:ext uri="{FF2B5EF4-FFF2-40B4-BE49-F238E27FC236}">
+                <a16:creationId xmlns:a16="http://schemas.microsoft.com/office/drawing/2014/main" id="{D9731CF0-6E15-013B-186B-19170307802F}"/>
+              </a:ext>
+            </a:extLst>
+          </p:cNvPr>
+          <p:cNvSpPr>
+            <a:spLocks noGrp="1"/>
+          </p:cNvSpPr>
+          <p:nvPr>
+            <p:ph type="ftr" sz="quarter" idx="11"/>
+          </p:nvPr>
+        </p:nvSpPr>
+        <p:spPr/>
+        <p:txBody>
+          <a:bodyPr/>
+          <a:lstStyle/>
+          <a:p>
+            <a:r>
+              <a:rPr lang="en-US" dirty="0"/>
+              <a:t>CSSC @ </a:t>
+            </a:r>
+            <a:r>
+              <a:rPr lang="en-US" dirty="0" err="1"/>
+              <a:t>UTDallas</a:t>
+            </a:r>
+            <a:endParaRPr lang="en-US" dirty="0"/>
+          </a:p>
+        </p:txBody>
+      </p:sp>
+      <p:sp>
+        <p:nvSpPr>
+          <p:cNvPr id="5" name="Slide Number Placeholder 4">
+            <a:extLst>
+              <a:ext uri="{FF2B5EF4-FFF2-40B4-BE49-F238E27FC236}">
+                <a16:creationId xmlns:a16="http://schemas.microsoft.com/office/drawing/2014/main" id="{D8DA2E64-1FF4-1342-A61A-E254B90B35D3}"/>
+              </a:ext>
+            </a:extLst>
+          </p:cNvPr>
+          <p:cNvSpPr>
+            <a:spLocks noGrp="1"/>
+          </p:cNvSpPr>
+          <p:nvPr>
+            <p:ph type="sldNum" sz="quarter" idx="12"/>
+          </p:nvPr>
+        </p:nvSpPr>
+        <p:spPr/>
+        <p:txBody>
+          <a:bodyPr/>
+          <a:lstStyle/>
+          <a:p>
+            <a:fld id="{C68DACDF-E1A9-A04C-A5FF-FC2443684BF5}" type="slidenum">
+              <a:rPr lang="en-US" smtClean="0"/>
+              <a:pPr/>
+              <a:t>17</a:t>
+            </a:fld>
+            <a:endParaRPr lang="en-US" dirty="0"/>
+          </a:p>
+        </p:txBody>
+      </p:sp>
+      <p:sp>
+        <p:nvSpPr>
+          <p:cNvPr id="3" name="Title 1">
+            <a:extLst>
+              <a:ext uri="{FF2B5EF4-FFF2-40B4-BE49-F238E27FC236}">
+                <a16:creationId xmlns:a16="http://schemas.microsoft.com/office/drawing/2014/main" id="{5BB4937C-7178-6287-7BDD-A5FD0D86BA72}"/>
+              </a:ext>
+            </a:extLst>
+          </p:cNvPr>
+          <p:cNvSpPr>
+            <a:spLocks noGrp="1"/>
+          </p:cNvSpPr>
+          <p:nvPr>
+            <p:ph type="title"/>
+          </p:nvPr>
+        </p:nvSpPr>
+        <p:spPr>
+          <a:xfrm>
+            <a:off x="838200" y="247914"/>
+            <a:ext cx="10515600" cy="1157575"/>
+          </a:xfrm>
+        </p:spPr>
+        <p:txBody>
+          <a:bodyPr>
+            <a:normAutofit/>
+          </a:bodyPr>
+          <a:lstStyle/>
+          <a:p>
+            <a:r>
+              <a:rPr lang="en-US" sz="4000" dirty="0">
+                <a:cs typeface="Arial"/>
+              </a:rPr>
+              <a:t>Gain Scheduling</a:t>
+            </a:r>
+          </a:p>
+        </p:txBody>
+      </p:sp>
+      <p:pic>
+        <p:nvPicPr>
+          <p:cNvPr id="5122" name="Picture 2">
+            <a:extLst>
+              <a:ext uri="{FF2B5EF4-FFF2-40B4-BE49-F238E27FC236}">
+                <a16:creationId xmlns:a16="http://schemas.microsoft.com/office/drawing/2014/main" id="{551AC9A2-4CAF-274D-87B4-D859F28E3BE5}"/>
+              </a:ext>
+            </a:extLst>
+          </p:cNvPr>
+          <p:cNvPicPr>
+            <a:picLocks noChangeAspect="1" noChangeArrowheads="1"/>
+          </p:cNvPicPr>
+          <p:nvPr/>
+        </p:nvPicPr>
+        <p:blipFill>
+          <a:blip r:embed="rId3">
+            <a:extLst>
+              <a:ext uri="{28A0092B-C50C-407E-A947-70E740481C1C}">
+                <a14:useLocalDpi xmlns:a14="http://schemas.microsoft.com/office/drawing/2010/main" val="0"/>
+              </a:ext>
+            </a:extLst>
+          </a:blip>
+          <a:srcRect/>
+          <a:stretch>
+            <a:fillRect/>
+          </a:stretch>
+        </p:blipFill>
+        <p:spPr bwMode="auto">
+          <a:xfrm>
+            <a:off x="6030880" y="1781353"/>
+            <a:ext cx="6161120" cy="3295291"/>
+          </a:xfrm>
+          <a:prstGeom prst="rect">
+            <a:avLst/>
+          </a:prstGeom>
+          <a:noFill/>
+          <a:extLst>
+            <a:ext uri="{909E8E84-426E-40DD-AFC4-6F175D3DCCD1}">
+              <a14:hiddenFill xmlns:a14="http://schemas.microsoft.com/office/drawing/2010/main">
+                <a:solidFill>
+                  <a:srgbClr val="FFFFFF"/>
+                </a:solidFill>
+              </a14:hiddenFill>
+            </a:ext>
+          </a:extLst>
+        </p:spPr>
+      </p:pic>
+      <p:pic>
+        <p:nvPicPr>
+          <p:cNvPr id="5124" name="Picture 4">
+            <a:extLst>
+              <a:ext uri="{FF2B5EF4-FFF2-40B4-BE49-F238E27FC236}">
+                <a16:creationId xmlns:a16="http://schemas.microsoft.com/office/drawing/2014/main" id="{6CC6EFF3-5B8C-2D17-AD55-805FB0B848BD}"/>
+              </a:ext>
+            </a:extLst>
+          </p:cNvPr>
+          <p:cNvPicPr>
+            <a:picLocks noChangeAspect="1" noChangeArrowheads="1"/>
+          </p:cNvPicPr>
+          <p:nvPr/>
+        </p:nvPicPr>
+        <p:blipFill>
+          <a:blip r:embed="rId4">
+            <a:extLst>
+              <a:ext uri="{28A0092B-C50C-407E-A947-70E740481C1C}">
+                <a14:useLocalDpi xmlns:a14="http://schemas.microsoft.com/office/drawing/2010/main" val="0"/>
+              </a:ext>
+            </a:extLst>
+          </a:blip>
+          <a:srcRect/>
+          <a:stretch>
+            <a:fillRect/>
+          </a:stretch>
+        </p:blipFill>
+        <p:spPr bwMode="auto">
+          <a:xfrm>
+            <a:off x="152400" y="1841829"/>
+            <a:ext cx="5314950" cy="3381375"/>
+          </a:xfrm>
+          <a:prstGeom prst="rect">
+            <a:avLst/>
+          </a:prstGeom>
+          <a:noFill/>
+          <a:extLst>
+            <a:ext uri="{909E8E84-426E-40DD-AFC4-6F175D3DCCD1}">
+              <a14:hiddenFill xmlns:a14="http://schemas.microsoft.com/office/drawing/2010/main">
+                <a:solidFill>
+                  <a:srgbClr val="FFFFFF"/>
+                </a:solidFill>
+              </a14:hiddenFill>
+            </a:ext>
+          </a:extLst>
+        </p:spPr>
+      </p:pic>
+    </p:spTree>
+    <p:extLst>
+      <p:ext uri="{BB962C8B-B14F-4D97-AF65-F5344CB8AC3E}">
+        <p14:creationId xmlns:p14="http://schemas.microsoft.com/office/powerpoint/2010/main" val="3927930605"/>
+      </p:ext>
+    </p:extLst>
+  </p:cSld>
+  <p:clrMapOvr>
+    <a:masterClrMapping/>
+  </p:clrMapOvr>
+</p:sld>
+</file>
+
+<file path=ppt/slides/slide18.xml><?xml version="1.0" encoding="utf-8"?>
 <p:sld xmlns:a="http://schemas.openxmlformats.org/drawingml/2006/main" xmlns:r="http://schemas.openxmlformats.org/officeDocument/2006/relationships" xmlns:p="http://schemas.openxmlformats.org/presentationml/2006/main">
   <p:cSld>
     <p:spTree>
@@ -6737,7 +8375,7 @@
             <a:fld id="{C68DACDF-E1A9-A04C-A5FF-FC2443684BF5}" type="slidenum">
               <a:rPr lang="en-US" smtClean="0"/>
               <a:pPr/>
-              <a:t>14</a:t>
+              <a:t>18</a:t>
             </a:fld>
             <a:endParaRPr lang="en-US" dirty="0"/>
           </a:p>
@@ -6953,7 +8591,7 @@
 </p:sld>
 </file>
 
-<file path=ppt/slides/slide15.xml><?xml version="1.0" encoding="utf-8"?>
+<file path=ppt/slides/slide19.xml><?xml version="1.0" encoding="utf-8"?>
 <p:sld xmlns:a="http://schemas.openxmlformats.org/drawingml/2006/main" xmlns:r="http://schemas.openxmlformats.org/officeDocument/2006/relationships" xmlns:p="http://schemas.openxmlformats.org/presentationml/2006/main" show="0">
   <p:cSld>
     <p:spTree>
@@ -7057,7 +8695,7 @@
             <a:fld id="{C68DACDF-E1A9-A04C-A5FF-FC2443684BF5}" type="slidenum">
               <a:rPr lang="en-US" smtClean="0"/>
               <a:pPr/>
-              <a:t>15</a:t>
+              <a:t>19</a:t>
             </a:fld>
             <a:endParaRPr lang="en-US" dirty="0"/>
           </a:p>
@@ -7346,7 +8984,327 @@
 </p:sld>
 </file>
 
-<file path=ppt/slides/slide16.xml><?xml version="1.0" encoding="utf-8"?>
+<file path=ppt/slides/slide2.xml><?xml version="1.0" encoding="utf-8"?>
+<p:sld xmlns:a="http://schemas.openxmlformats.org/drawingml/2006/main" xmlns:r="http://schemas.openxmlformats.org/officeDocument/2006/relationships" xmlns:p="http://schemas.openxmlformats.org/presentationml/2006/main">
+  <p:cSld>
+    <p:spTree>
+      <p:nvGrpSpPr>
+        <p:cNvPr id="1" name="">
+          <a:extLst>
+            <a:ext uri="{FF2B5EF4-FFF2-40B4-BE49-F238E27FC236}">
+              <a16:creationId xmlns:a16="http://schemas.microsoft.com/office/drawing/2014/main" id="{7734CE8F-8547-855D-FBFE-35ED0454BFE8}"/>
+            </a:ext>
+          </a:extLst>
+        </p:cNvPr>
+        <p:cNvGrpSpPr/>
+        <p:nvPr/>
+      </p:nvGrpSpPr>
+      <p:grpSpPr>
+        <a:xfrm>
+          <a:off x="0" y="0"/>
+          <a:ext cx="0" cy="0"/>
+          <a:chOff x="0" y="0"/>
+          <a:chExt cx="0" cy="0"/>
+        </a:xfrm>
+      </p:grpSpPr>
+      <p:sp>
+        <p:nvSpPr>
+          <p:cNvPr id="4" name="Footer Placeholder 3">
+            <a:extLst>
+              <a:ext uri="{FF2B5EF4-FFF2-40B4-BE49-F238E27FC236}">
+                <a16:creationId xmlns:a16="http://schemas.microsoft.com/office/drawing/2014/main" id="{505D441E-ABCA-396F-FF79-492B3631F3B4}"/>
+              </a:ext>
+            </a:extLst>
+          </p:cNvPr>
+          <p:cNvSpPr>
+            <a:spLocks noGrp="1"/>
+          </p:cNvSpPr>
+          <p:nvPr>
+            <p:ph type="ftr" sz="quarter" idx="11"/>
+          </p:nvPr>
+        </p:nvSpPr>
+        <p:spPr/>
+        <p:txBody>
+          <a:bodyPr/>
+          <a:lstStyle/>
+          <a:p>
+            <a:r>
+              <a:rPr lang="en-US" dirty="0"/>
+              <a:t>CSSC @ </a:t>
+            </a:r>
+            <a:r>
+              <a:rPr lang="en-US" dirty="0" err="1"/>
+              <a:t>UTDallas</a:t>
+            </a:r>
+            <a:endParaRPr lang="en-US" dirty="0"/>
+          </a:p>
+        </p:txBody>
+      </p:sp>
+      <p:sp>
+        <p:nvSpPr>
+          <p:cNvPr id="5" name="Slide Number Placeholder 4">
+            <a:extLst>
+              <a:ext uri="{FF2B5EF4-FFF2-40B4-BE49-F238E27FC236}">
+                <a16:creationId xmlns:a16="http://schemas.microsoft.com/office/drawing/2014/main" id="{78F72CA4-3292-C3D0-ECC4-21D7CAB56ABD}"/>
+              </a:ext>
+            </a:extLst>
+          </p:cNvPr>
+          <p:cNvSpPr>
+            <a:spLocks noGrp="1"/>
+          </p:cNvSpPr>
+          <p:nvPr>
+            <p:ph type="sldNum" sz="quarter" idx="12"/>
+          </p:nvPr>
+        </p:nvSpPr>
+        <p:spPr/>
+        <p:txBody>
+          <a:bodyPr/>
+          <a:lstStyle/>
+          <a:p>
+            <a:fld id="{C68DACDF-E1A9-A04C-A5FF-FC2443684BF5}" type="slidenum">
+              <a:rPr lang="en-US" smtClean="0"/>
+              <a:pPr/>
+              <a:t>2</a:t>
+            </a:fld>
+            <a:endParaRPr lang="en-US" dirty="0"/>
+          </a:p>
+        </p:txBody>
+      </p:sp>
+      <p:sp>
+        <p:nvSpPr>
+          <p:cNvPr id="3" name="Title 1">
+            <a:extLst>
+              <a:ext uri="{FF2B5EF4-FFF2-40B4-BE49-F238E27FC236}">
+                <a16:creationId xmlns:a16="http://schemas.microsoft.com/office/drawing/2014/main" id="{1EEF2089-2E2B-7AA9-B542-19F24CB99805}"/>
+              </a:ext>
+            </a:extLst>
+          </p:cNvPr>
+          <p:cNvSpPr>
+            <a:spLocks noGrp="1"/>
+          </p:cNvSpPr>
+          <p:nvPr>
+            <p:ph type="title"/>
+          </p:nvPr>
+        </p:nvSpPr>
+        <p:spPr>
+          <a:xfrm>
+            <a:off x="838200" y="247914"/>
+            <a:ext cx="10515600" cy="1157575"/>
+          </a:xfrm>
+        </p:spPr>
+        <p:txBody>
+          <a:bodyPr>
+            <a:normAutofit/>
+          </a:bodyPr>
+          <a:lstStyle/>
+          <a:p>
+            <a:r>
+              <a:rPr lang="en-US" sz="4000" dirty="0"/>
+              <a:t>The PID Workshop</a:t>
+            </a:r>
+            <a:endParaRPr lang="en-US" sz="4000" dirty="0">
+              <a:cs typeface="Arial"/>
+            </a:endParaRPr>
+          </a:p>
+        </p:txBody>
+      </p:sp>
+      <p:sp>
+        <p:nvSpPr>
+          <p:cNvPr id="7" name="Content Placeholder 2">
+            <a:extLst>
+              <a:ext uri="{FF2B5EF4-FFF2-40B4-BE49-F238E27FC236}">
+                <a16:creationId xmlns:a16="http://schemas.microsoft.com/office/drawing/2014/main" id="{DE04B041-D11F-C865-7C88-19739B42EA1D}"/>
+              </a:ext>
+            </a:extLst>
+          </p:cNvPr>
+          <p:cNvSpPr>
+            <a:spLocks noGrp="1"/>
+          </p:cNvSpPr>
+          <p:nvPr>
+            <p:ph idx="1"/>
+          </p:nvPr>
+        </p:nvSpPr>
+        <p:spPr>
+          <a:xfrm>
+            <a:off x="838200" y="1579419"/>
+            <a:ext cx="10515600" cy="4362092"/>
+          </a:xfrm>
+        </p:spPr>
+        <p:txBody>
+          <a:bodyPr vert="horz" lIns="91440" tIns="45720" rIns="91440" bIns="45720" rtlCol="0" anchor="t">
+            <a:normAutofit/>
+          </a:bodyPr>
+          <a:lstStyle/>
+          <a:p>
+            <a:pPr marL="342900" indent="-342900">
+              <a:buFont typeface="Arial" panose="020B0604020202020204" pitchFamily="34" charset="0"/>
+              <a:buChar char="•"/>
+            </a:pPr>
+            <a:r>
+              <a:rPr lang="en-US" sz="2800" dirty="0"/>
+              <a:t>Intro to PID</a:t>
+            </a:r>
+            <a:endParaRPr lang="en-US" sz="2800">
+              <a:cs typeface="Arial"/>
+            </a:endParaRPr>
+          </a:p>
+          <a:p>
+            <a:pPr marL="342900" indent="-342900">
+              <a:buFont typeface="Arial" panose="020B0604020202020204" pitchFamily="34" charset="0"/>
+              <a:buChar char="•"/>
+            </a:pPr>
+            <a:r>
+              <a:rPr lang="en-US" sz="2800" dirty="0"/>
+              <a:t>Manual tuning</a:t>
+            </a:r>
+            <a:endParaRPr lang="en-US" sz="2800">
+              <a:cs typeface="Arial"/>
+            </a:endParaRPr>
+          </a:p>
+          <a:p>
+            <a:pPr marL="342900" indent="-342900">
+              <a:buFont typeface="Arial" panose="020B0604020202020204" pitchFamily="34" charset="0"/>
+              <a:buChar char="•"/>
+            </a:pPr>
+            <a:r>
+              <a:rPr lang="en-US" sz="2800" dirty="0"/>
+              <a:t>Problems with the D</a:t>
+            </a:r>
+            <a:endParaRPr lang="en-US" sz="2800">
+              <a:cs typeface="Arial"/>
+            </a:endParaRPr>
+          </a:p>
+          <a:p>
+            <a:pPr marL="342900" indent="-342900">
+              <a:buFont typeface="Arial" panose="020B0604020202020204" pitchFamily="34" charset="0"/>
+              <a:buChar char="•"/>
+            </a:pPr>
+            <a:r>
+              <a:rPr lang="en-US" sz="2800" dirty="0"/>
+              <a:t>Integral Anti-windup</a:t>
+            </a:r>
+            <a:endParaRPr lang="en-US" sz="2800" dirty="0">
+              <a:cs typeface="Arial"/>
+            </a:endParaRPr>
+          </a:p>
+          <a:p>
+            <a:pPr marL="342900" indent="-342900">
+              <a:buFont typeface="Arial" panose="020B0604020202020204" pitchFamily="34" charset="0"/>
+              <a:buChar char="•"/>
+            </a:pPr>
+            <a:r>
+              <a:rPr lang="en-US" sz="2800" dirty="0"/>
+              <a:t>Ziegler-Nichols (ZN) tuning</a:t>
+            </a:r>
+            <a:endParaRPr lang="en-US" sz="2800">
+              <a:cs typeface="Arial"/>
+            </a:endParaRPr>
+          </a:p>
+          <a:p>
+            <a:pPr marL="342900" indent="-342900">
+              <a:buFont typeface="Arial" panose="020B0604020202020204" pitchFamily="34" charset="0"/>
+              <a:buChar char="•"/>
+            </a:pPr>
+            <a:r>
+              <a:rPr lang="en-US" sz="2800" dirty="0"/>
+              <a:t>Gain Scheduling</a:t>
+            </a:r>
+            <a:endParaRPr lang="en-US" sz="2800">
+              <a:cs typeface="Arial"/>
+            </a:endParaRPr>
+          </a:p>
+        </p:txBody>
+      </p:sp>
+      <p:sp>
+        <p:nvSpPr>
+          <p:cNvPr id="6" name="Rectangle 5">
+            <a:extLst>
+              <a:ext uri="{FF2B5EF4-FFF2-40B4-BE49-F238E27FC236}">
+                <a16:creationId xmlns:a16="http://schemas.microsoft.com/office/drawing/2014/main" id="{A3588105-8D0B-554C-8FD5-802C2115F0AF}"/>
+              </a:ext>
+            </a:extLst>
+          </p:cNvPr>
+          <p:cNvSpPr/>
+          <p:nvPr/>
+        </p:nvSpPr>
+        <p:spPr>
+          <a:xfrm>
+            <a:off x="4036594" y="5254290"/>
+            <a:ext cx="7800473" cy="688306"/>
+          </a:xfrm>
+          <a:prstGeom prst="rect">
+            <a:avLst/>
+          </a:prstGeom>
+          <a:solidFill>
+            <a:schemeClr val="accent1">
+              <a:lumMod val="60000"/>
+              <a:lumOff val="40000"/>
+            </a:schemeClr>
+          </a:solidFill>
+        </p:spPr>
+        <p:style>
+          <a:lnRef idx="2">
+            <a:schemeClr val="accent1">
+              <a:shade val="15000"/>
+            </a:schemeClr>
+          </a:lnRef>
+          <a:fillRef idx="1">
+            <a:schemeClr val="accent1"/>
+          </a:fillRef>
+          <a:effectRef idx="0">
+            <a:schemeClr val="accent1"/>
+          </a:effectRef>
+          <a:fontRef idx="minor">
+            <a:schemeClr val="lt1"/>
+          </a:fontRef>
+        </p:style>
+        <p:txBody>
+          <a:bodyPr rtlCol="0" anchor="ctr"/>
+          <a:lstStyle/>
+          <a:p>
+            <a:pPr algn="ctr"/>
+            <a:r>
+              <a:rPr lang="en-US" sz="1800" b="1" baseline="0">
+                <a:latin typeface="Arial"/>
+              </a:rPr>
+              <a:t>Link: </a:t>
+            </a:r>
+            <a:r>
+              <a:rPr lang="en-US" sz="1800" b="1" u="sng" strike="noStrike" baseline="0">
+                <a:solidFill>
+                  <a:srgbClr val="181717"/>
+                </a:solidFill>
+                <a:latin typeface="Arial"/>
+                <a:ea typeface="Segoe UI"/>
+                <a:cs typeface="Segoe UI"/>
+                <a:hlinkClick r:id="rId3">
+                  <a:extLst>
+                    <a:ext uri="{A12FA001-AC4F-418D-AE19-62706E023703}">
+                      <ahyp:hlinkClr xmlns:ahyp="http://schemas.microsoft.com/office/drawing/2018/hyperlinkcolor" val="tx"/>
+                    </a:ext>
+                  </a:extLst>
+                </a:hlinkClick>
+              </a:rPr>
+              <a:t>https://github.com/jonaswagner2826/DSC_SysID_Workshop</a:t>
+            </a:r>
+            <a:endParaRPr lang="en-US"/>
+          </a:p>
+        </p:txBody>
+      </p:sp>
+    </p:spTree>
+    <p:extLst>
+      <p:ext uri="{BB962C8B-B14F-4D97-AF65-F5344CB8AC3E}">
+        <p14:creationId xmlns:p14="http://schemas.microsoft.com/office/powerpoint/2010/main" val="2527056280"/>
+      </p:ext>
+    </p:extLst>
+  </p:cSld>
+  <p:clrMapOvr>
+    <a:masterClrMapping/>
+  </p:clrMapOvr>
+</p:sld>
+</file>
+
+<file path=ppt/slides/slide20.xml><?xml version="1.0" encoding="utf-8"?>
 <p:sld xmlns:a="http://schemas.openxmlformats.org/drawingml/2006/main" xmlns:r="http://schemas.openxmlformats.org/officeDocument/2006/relationships" xmlns:p="http://schemas.openxmlformats.org/presentationml/2006/main" show="0">
   <p:cSld>
     <p:spTree>
@@ -7450,7 +9408,7 @@
             <a:fld id="{C68DACDF-E1A9-A04C-A5FF-FC2443684BF5}" type="slidenum">
               <a:rPr lang="en-US" smtClean="0"/>
               <a:pPr/>
-              <a:t>16</a:t>
+              <a:t>20</a:t>
             </a:fld>
             <a:endParaRPr lang="en-US" dirty="0"/>
           </a:p>
@@ -8782,318 +10740,6 @@
 </p:sld>
 </file>
 
-<file path=ppt/slides/slide2.xml><?xml version="1.0" encoding="utf-8"?>
-<p:sld xmlns:a="http://schemas.openxmlformats.org/drawingml/2006/main" xmlns:r="http://schemas.openxmlformats.org/officeDocument/2006/relationships" xmlns:p="http://schemas.openxmlformats.org/presentationml/2006/main">
-  <p:cSld>
-    <p:spTree>
-      <p:nvGrpSpPr>
-        <p:cNvPr id="1" name="">
-          <a:extLst>
-            <a:ext uri="{FF2B5EF4-FFF2-40B4-BE49-F238E27FC236}">
-              <a16:creationId xmlns:a16="http://schemas.microsoft.com/office/drawing/2014/main" id="{7734CE8F-8547-855D-FBFE-35ED0454BFE8}"/>
-            </a:ext>
-          </a:extLst>
-        </p:cNvPr>
-        <p:cNvGrpSpPr/>
-        <p:nvPr/>
-      </p:nvGrpSpPr>
-      <p:grpSpPr>
-        <a:xfrm>
-          <a:off x="0" y="0"/>
-          <a:ext cx="0" cy="0"/>
-          <a:chOff x="0" y="0"/>
-          <a:chExt cx="0" cy="0"/>
-        </a:xfrm>
-      </p:grpSpPr>
-      <p:sp>
-        <p:nvSpPr>
-          <p:cNvPr id="4" name="Footer Placeholder 3">
-            <a:extLst>
-              <a:ext uri="{FF2B5EF4-FFF2-40B4-BE49-F238E27FC236}">
-                <a16:creationId xmlns:a16="http://schemas.microsoft.com/office/drawing/2014/main" id="{505D441E-ABCA-396F-FF79-492B3631F3B4}"/>
-              </a:ext>
-            </a:extLst>
-          </p:cNvPr>
-          <p:cNvSpPr>
-            <a:spLocks noGrp="1"/>
-          </p:cNvSpPr>
-          <p:nvPr>
-            <p:ph type="ftr" sz="quarter" idx="11"/>
-          </p:nvPr>
-        </p:nvSpPr>
-        <p:spPr/>
-        <p:txBody>
-          <a:bodyPr/>
-          <a:lstStyle/>
-          <a:p>
-            <a:r>
-              <a:rPr lang="en-US" dirty="0"/>
-              <a:t>CSSC @ </a:t>
-            </a:r>
-            <a:r>
-              <a:rPr lang="en-US" dirty="0" err="1"/>
-              <a:t>UTDallas</a:t>
-            </a:r>
-            <a:endParaRPr lang="en-US" dirty="0"/>
-          </a:p>
-        </p:txBody>
-      </p:sp>
-      <p:sp>
-        <p:nvSpPr>
-          <p:cNvPr id="5" name="Slide Number Placeholder 4">
-            <a:extLst>
-              <a:ext uri="{FF2B5EF4-FFF2-40B4-BE49-F238E27FC236}">
-                <a16:creationId xmlns:a16="http://schemas.microsoft.com/office/drawing/2014/main" id="{78F72CA4-3292-C3D0-ECC4-21D7CAB56ABD}"/>
-              </a:ext>
-            </a:extLst>
-          </p:cNvPr>
-          <p:cNvSpPr>
-            <a:spLocks noGrp="1"/>
-          </p:cNvSpPr>
-          <p:nvPr>
-            <p:ph type="sldNum" sz="quarter" idx="12"/>
-          </p:nvPr>
-        </p:nvSpPr>
-        <p:spPr/>
-        <p:txBody>
-          <a:bodyPr/>
-          <a:lstStyle/>
-          <a:p>
-            <a:fld id="{C68DACDF-E1A9-A04C-A5FF-FC2443684BF5}" type="slidenum">
-              <a:rPr lang="en-US" smtClean="0"/>
-              <a:pPr/>
-              <a:t>2</a:t>
-            </a:fld>
-            <a:endParaRPr lang="en-US" dirty="0"/>
-          </a:p>
-        </p:txBody>
-      </p:sp>
-      <p:sp>
-        <p:nvSpPr>
-          <p:cNvPr id="3" name="Title 1">
-            <a:extLst>
-              <a:ext uri="{FF2B5EF4-FFF2-40B4-BE49-F238E27FC236}">
-                <a16:creationId xmlns:a16="http://schemas.microsoft.com/office/drawing/2014/main" id="{1EEF2089-2E2B-7AA9-B542-19F24CB99805}"/>
-              </a:ext>
-            </a:extLst>
-          </p:cNvPr>
-          <p:cNvSpPr>
-            <a:spLocks noGrp="1"/>
-          </p:cNvSpPr>
-          <p:nvPr>
-            <p:ph type="title"/>
-          </p:nvPr>
-        </p:nvSpPr>
-        <p:spPr>
-          <a:xfrm>
-            <a:off x="838200" y="247914"/>
-            <a:ext cx="10515600" cy="1157575"/>
-          </a:xfrm>
-        </p:spPr>
-        <p:txBody>
-          <a:bodyPr>
-            <a:normAutofit/>
-          </a:bodyPr>
-          <a:lstStyle/>
-          <a:p>
-            <a:r>
-              <a:rPr lang="en-US" sz="4000" dirty="0"/>
-              <a:t>The PID Workshop</a:t>
-            </a:r>
-            <a:endParaRPr lang="en-US" sz="4000" dirty="0">
-              <a:cs typeface="Arial"/>
-            </a:endParaRPr>
-          </a:p>
-        </p:txBody>
-      </p:sp>
-      <p:sp>
-        <p:nvSpPr>
-          <p:cNvPr id="7" name="Content Placeholder 2">
-            <a:extLst>
-              <a:ext uri="{FF2B5EF4-FFF2-40B4-BE49-F238E27FC236}">
-                <a16:creationId xmlns:a16="http://schemas.microsoft.com/office/drawing/2014/main" id="{DE04B041-D11F-C865-7C88-19739B42EA1D}"/>
-              </a:ext>
-            </a:extLst>
-          </p:cNvPr>
-          <p:cNvSpPr>
-            <a:spLocks noGrp="1"/>
-          </p:cNvSpPr>
-          <p:nvPr>
-            <p:ph idx="1"/>
-          </p:nvPr>
-        </p:nvSpPr>
-        <p:spPr>
-          <a:xfrm>
-            <a:off x="838200" y="1579419"/>
-            <a:ext cx="10515600" cy="4362092"/>
-          </a:xfrm>
-        </p:spPr>
-        <p:txBody>
-          <a:bodyPr vert="horz" lIns="91440" tIns="45720" rIns="91440" bIns="45720" rtlCol="0" anchor="t">
-            <a:normAutofit/>
-          </a:bodyPr>
-          <a:lstStyle/>
-          <a:p>
-            <a:pPr marL="342900" indent="-342900">
-              <a:buFont typeface="Arial" panose="020B0604020202020204" pitchFamily="34" charset="0"/>
-              <a:buChar char="•"/>
-            </a:pPr>
-            <a:r>
-              <a:rPr lang="en-US" sz="2800" dirty="0"/>
-              <a:t>Intro to PID</a:t>
-            </a:r>
-            <a:endParaRPr lang="en-US" sz="2800" dirty="0">
-              <a:cs typeface="Arial"/>
-            </a:endParaRPr>
-          </a:p>
-          <a:p>
-            <a:pPr marL="342900" indent="-342900">
-              <a:buFont typeface="Arial" panose="020B0604020202020204" pitchFamily="34" charset="0"/>
-              <a:buChar char="•"/>
-            </a:pPr>
-            <a:r>
-              <a:rPr lang="en-US" sz="2800" dirty="0"/>
-              <a:t>Manual tuning</a:t>
-            </a:r>
-            <a:endParaRPr lang="en-US" sz="2800" dirty="0">
-              <a:cs typeface="Arial"/>
-            </a:endParaRPr>
-          </a:p>
-          <a:p>
-            <a:pPr marL="342900" indent="-342900">
-              <a:buFont typeface="Arial" panose="020B0604020202020204" pitchFamily="34" charset="0"/>
-              <a:buChar char="•"/>
-            </a:pPr>
-            <a:r>
-              <a:rPr lang="en-US" sz="2800" dirty="0"/>
-              <a:t>Problems with the D</a:t>
-            </a:r>
-            <a:endParaRPr lang="en-US" sz="2800" dirty="0">
-              <a:cs typeface="Arial"/>
-            </a:endParaRPr>
-          </a:p>
-          <a:p>
-            <a:pPr marL="342900" indent="-342900">
-              <a:buFont typeface="Arial" panose="020B0604020202020204" pitchFamily="34" charset="0"/>
-              <a:buChar char="•"/>
-            </a:pPr>
-            <a:r>
-              <a:rPr lang="en-US" sz="2800" dirty="0"/>
-              <a:t>Integral Anti-windup</a:t>
-            </a:r>
-            <a:endParaRPr lang="en-US" sz="2800" dirty="0">
-              <a:cs typeface="Arial"/>
-            </a:endParaRPr>
-          </a:p>
-          <a:p>
-            <a:pPr marL="342900" indent="-342900">
-              <a:buFont typeface="Arial" panose="020B0604020202020204" pitchFamily="34" charset="0"/>
-              <a:buChar char="•"/>
-            </a:pPr>
-            <a:r>
-              <a:rPr lang="en-US" sz="2800" dirty="0"/>
-              <a:t>Ziegler-Nichols (ZN) tuning</a:t>
-            </a:r>
-            <a:endParaRPr lang="en-US" sz="2800" dirty="0">
-              <a:cs typeface="Arial"/>
-            </a:endParaRPr>
-          </a:p>
-          <a:p>
-            <a:pPr marL="342900" indent="-342900">
-              <a:buFont typeface="Arial" panose="020B0604020202020204" pitchFamily="34" charset="0"/>
-              <a:buChar char="•"/>
-            </a:pPr>
-            <a:r>
-              <a:rPr lang="en-US" sz="2800" dirty="0"/>
-              <a:t>Gain Scheduling</a:t>
-            </a:r>
-            <a:endParaRPr lang="en-US" sz="2800" dirty="0">
-              <a:cs typeface="Arial"/>
-            </a:endParaRPr>
-          </a:p>
-        </p:txBody>
-      </p:sp>
-      <p:sp>
-        <p:nvSpPr>
-          <p:cNvPr id="6" name="Rectangle 5">
-            <a:extLst>
-              <a:ext uri="{FF2B5EF4-FFF2-40B4-BE49-F238E27FC236}">
-                <a16:creationId xmlns:a16="http://schemas.microsoft.com/office/drawing/2014/main" id="{A3588105-8D0B-554C-8FD5-802C2115F0AF}"/>
-              </a:ext>
-            </a:extLst>
-          </p:cNvPr>
-          <p:cNvSpPr/>
-          <p:nvPr/>
-        </p:nvSpPr>
-        <p:spPr>
-          <a:xfrm>
-            <a:off x="5124091" y="5254290"/>
-            <a:ext cx="6712976" cy="688306"/>
-          </a:xfrm>
-          <a:prstGeom prst="rect">
-            <a:avLst/>
-          </a:prstGeom>
-          <a:solidFill>
-            <a:schemeClr val="accent1">
-              <a:lumMod val="60000"/>
-              <a:lumOff val="40000"/>
-            </a:schemeClr>
-          </a:solidFill>
-        </p:spPr>
-        <p:style>
-          <a:lnRef idx="2">
-            <a:schemeClr val="accent1">
-              <a:shade val="15000"/>
-            </a:schemeClr>
-          </a:lnRef>
-          <a:fillRef idx="1">
-            <a:schemeClr val="accent1"/>
-          </a:fillRef>
-          <a:effectRef idx="0">
-            <a:schemeClr val="accent1"/>
-          </a:effectRef>
-          <a:fontRef idx="minor">
-            <a:schemeClr val="lt1"/>
-          </a:fontRef>
-        </p:style>
-        <p:txBody>
-          <a:bodyPr rtlCol="0" anchor="ctr"/>
-          <a:lstStyle/>
-          <a:p>
-            <a:pPr algn="ctr"/>
-            <a:r>
-              <a:rPr lang="en-US" sz="1800" b="1" baseline="0" dirty="0">
-                <a:latin typeface="Arial"/>
-              </a:rPr>
-              <a:t>Link: </a:t>
-            </a:r>
-            <a:r>
-              <a:rPr lang="en-US" b="1" u="sng" dirty="0">
-                <a:solidFill>
-                  <a:srgbClr val="181717"/>
-                </a:solidFill>
-                <a:ea typeface="Segoe UI"/>
-                <a:cs typeface="Segoe UI"/>
-              </a:rPr>
-              <a:t>https://github.com/m-usama-z/cssc-pid-workshop</a:t>
-            </a:r>
-            <a:endParaRPr lang="en-US" dirty="0"/>
-          </a:p>
-        </p:txBody>
-      </p:sp>
-    </p:spTree>
-    <p:extLst>
-      <p:ext uri="{BB962C8B-B14F-4D97-AF65-F5344CB8AC3E}">
-        <p14:creationId xmlns:p14="http://schemas.microsoft.com/office/powerpoint/2010/main" val="2527056280"/>
-      </p:ext>
-    </p:extLst>
-  </p:cSld>
-  <p:clrMapOvr>
-    <a:masterClrMapping/>
-  </p:clrMapOvr>
-</p:sld>
-</file>
-
 <file path=ppt/slides/slide3.xml><?xml version="1.0" encoding="utf-8"?>
 <p:sld xmlns:a="http://schemas.openxmlformats.org/drawingml/2006/main" xmlns:r="http://schemas.openxmlformats.org/officeDocument/2006/relationships" xmlns:p="http://schemas.openxmlformats.org/presentationml/2006/main">
   <p:cSld>
@@ -9220,34 +10866,49 @@
       </p:sp>
       <p:pic>
         <p:nvPicPr>
-          <p:cNvPr id="2" name="Content Placeholder 1" descr="A diagram of a mathematical equation&#10;&#10;AI-generated content may be incorrect.">
+          <p:cNvPr id="3075" name="Picture 3" descr="undefined">
             <a:extLst>
               <a:ext uri="{FF2B5EF4-FFF2-40B4-BE49-F238E27FC236}">
-                <a16:creationId xmlns:a16="http://schemas.microsoft.com/office/drawing/2014/main" id="{107BC1D6-24E7-99E1-DB84-D666CBDC07FE}"/>
+                <a16:creationId xmlns:a16="http://schemas.microsoft.com/office/drawing/2014/main" id="{BCECB027-5A5C-F465-7EEA-8A19DEAE821C}"/>
               </a:ext>
             </a:extLst>
           </p:cNvPr>
           <p:cNvPicPr>
-            <a:picLocks noGrp="1" noChangeAspect="1"/>
+            <a:picLocks noChangeAspect="1" noChangeArrowheads="1"/>
           </p:cNvPicPr>
-          <p:nvPr>
-            <p:ph idx="1"/>
-          </p:nvPr>
+          <p:nvPr/>
         </p:nvPicPr>
         <p:blipFill>
-          <a:blip r:embed="rId3"/>
+          <a:blip r:embed="rId3">
+            <a:extLst>
+              <a:ext uri="{28A0092B-C50C-407E-A947-70E740481C1C}">
+                <a14:useLocalDpi xmlns:a14="http://schemas.microsoft.com/office/drawing/2010/main" val="0"/>
+              </a:ext>
+            </a:extLst>
+          </a:blip>
+          <a:srcRect/>
           <a:stretch>
             <a:fillRect/>
           </a:stretch>
         </p:blipFill>
-        <p:spPr>
+        <p:spPr bwMode="auto">
           <a:xfrm>
-            <a:off x="676275" y="1412552"/>
-            <a:ext cx="11039475" cy="4600575"/>
+            <a:off x="1079739" y="1644570"/>
+            <a:ext cx="10032521" cy="3568860"/>
           </a:xfrm>
           <a:prstGeom prst="rect">
             <a:avLst/>
           </a:prstGeom>
+          <a:noFill/>
+          <a:extLst>
+            <a:ext uri="{909E8E84-426E-40DD-AFC4-6F175D3DCCD1}">
+              <a14:hiddenFill xmlns:a14="http://schemas.microsoft.com/office/drawing/2010/main">
+                <a:solidFill>
+                  <a:srgbClr val="FFFFFF"/>
+                </a:solidFill>
+              </a14:hiddenFill>
+            </a:ext>
+          </a:extLst>
         </p:spPr>
       </p:pic>
     </p:spTree>
@@ -9387,8 +11048,8 @@
           </a:p>
         </p:txBody>
       </p:sp>
-      <mc:AlternateContent xmlns:mc="http://schemas.openxmlformats.org/markup-compatibility/2006" xmlns:a14="http://schemas.microsoft.com/office/drawing/2010/main">
-        <mc:Choice Requires="a14">
+      <mc:AlternateContent xmlns:mc="http://schemas.openxmlformats.org/markup-compatibility/2006">
+        <mc:Choice xmlns:a14="http://schemas.microsoft.com/office/drawing/2010/main" Requires="a14">
           <p:sp>
             <p:nvSpPr>
               <p:cNvPr id="7" name="Content Placeholder 2">
@@ -9972,6 +11633,47 @@
                   <a:buFont typeface="Arial" panose="020B0604020202020204" pitchFamily="34" charset="0"/>
                   <a:buChar char="•"/>
                 </a:pPr>
+                <a14:m>
+                  <m:oMath xmlns:m="http://schemas.openxmlformats.org/officeDocument/2006/math">
+                    <m:sSub>
+                      <m:sSubPr>
+                        <m:ctrlPr>
+                          <a:rPr lang="en-US" sz="2800" i="1">
+                            <a:solidFill>
+                              <a:schemeClr val="accent2"/>
+                            </a:solidFill>
+                            <a:latin typeface="Cambria Math" panose="02040503050406030204" pitchFamily="18" charset="0"/>
+                            <a:ea typeface="Cambria Math"/>
+                          </a:rPr>
+                        </m:ctrlPr>
+                      </m:sSubPr>
+                      <m:e>
+                        <m:r>
+                          <a:rPr lang="en-US" sz="2800" i="1">
+                            <a:solidFill>
+                              <a:schemeClr val="accent2"/>
+                            </a:solidFill>
+                            <a:latin typeface="Cambria Math" panose="02040503050406030204" pitchFamily="18" charset="0"/>
+                            <a:ea typeface="Cambria Math"/>
+                          </a:rPr>
+                          <m:t>𝐾</m:t>
+                        </m:r>
+                      </m:e>
+                      <m:sub>
+                        <m:r>
+                          <a:rPr lang="en-US" sz="2800" i="1">
+                            <a:solidFill>
+                              <a:schemeClr val="accent2"/>
+                            </a:solidFill>
+                            <a:latin typeface="Cambria Math" panose="02040503050406030204" pitchFamily="18" charset="0"/>
+                            <a:ea typeface="Cambria Math"/>
+                          </a:rPr>
+                          <m:t>𝑝</m:t>
+                        </m:r>
+                      </m:sub>
+                    </m:sSub>
+                  </m:oMath>
+                </a14:m>
                 <a:r>
                   <a:rPr lang="en-US" sz="2800" dirty="0">
                     <a:solidFill>
@@ -9979,7 +11681,7 @@
                     </a:solidFill>
                     <a:latin typeface="Aptos"/>
                   </a:rPr>
-                  <a:t>P reacts to present error</a:t>
+                  <a:t> reacts to present error</a:t>
                 </a:r>
                 <a:endParaRPr lang="en-US" sz="2800" dirty="0">
                   <a:latin typeface="Aptos"/>
@@ -9999,6 +11701,47 @@
                   <a:buFont typeface="Arial" panose="020B0604020202020204" pitchFamily="34" charset="0"/>
                   <a:buChar char="•"/>
                 </a:pPr>
+                <a14:m>
+                  <m:oMath xmlns:m="http://schemas.openxmlformats.org/officeDocument/2006/math">
+                    <m:sSub>
+                      <m:sSubPr>
+                        <m:ctrlPr>
+                          <a:rPr lang="en-US" sz="2800" i="1">
+                            <a:solidFill>
+                              <a:schemeClr val="accent3"/>
+                            </a:solidFill>
+                            <a:latin typeface="Cambria Math" panose="02040503050406030204" pitchFamily="18" charset="0"/>
+                            <a:ea typeface="Cambria Math"/>
+                          </a:rPr>
+                        </m:ctrlPr>
+                      </m:sSubPr>
+                      <m:e>
+                        <m:r>
+                          <a:rPr lang="en-US" sz="2800" i="1">
+                            <a:solidFill>
+                              <a:schemeClr val="accent3"/>
+                            </a:solidFill>
+                            <a:latin typeface="Cambria Math" panose="02040503050406030204" pitchFamily="18" charset="0"/>
+                            <a:ea typeface="Cambria Math"/>
+                          </a:rPr>
+                          <m:t>𝐾</m:t>
+                        </m:r>
+                      </m:e>
+                      <m:sub>
+                        <m:r>
+                          <a:rPr lang="en-US" sz="2800" i="1">
+                            <a:solidFill>
+                              <a:schemeClr val="accent3"/>
+                            </a:solidFill>
+                            <a:latin typeface="Cambria Math" panose="02040503050406030204" pitchFamily="18" charset="0"/>
+                            <a:ea typeface="Cambria Math"/>
+                          </a:rPr>
+                          <m:t>𝑖</m:t>
+                        </m:r>
+                      </m:sub>
+                    </m:sSub>
+                  </m:oMath>
+                </a14:m>
                 <a:r>
                   <a:rPr lang="en-US" sz="2800" dirty="0">
                     <a:solidFill>
@@ -10006,7 +11749,7 @@
                     </a:solidFill>
                     <a:latin typeface="Aptos"/>
                   </a:rPr>
-                  <a:t>I removes steady-state offset</a:t>
+                  <a:t> removes steady-state offset</a:t>
                 </a:r>
                 <a:endParaRPr lang="en-US" sz="2800" dirty="0">
                   <a:latin typeface="Aptos"/>
@@ -10026,6 +11769,47 @@
                   <a:buFont typeface="Arial" panose="020B0604020202020204" pitchFamily="34" charset="0"/>
                   <a:buChar char="•"/>
                 </a:pPr>
+                <a14:m>
+                  <m:oMath xmlns:m="http://schemas.openxmlformats.org/officeDocument/2006/math">
+                    <m:sSub>
+                      <m:sSubPr>
+                        <m:ctrlPr>
+                          <a:rPr lang="en-US" sz="2800" i="1">
+                            <a:solidFill>
+                              <a:schemeClr val="accent1"/>
+                            </a:solidFill>
+                            <a:latin typeface="Cambria Math" panose="02040503050406030204" pitchFamily="18" charset="0"/>
+                            <a:ea typeface="Cambria Math"/>
+                          </a:rPr>
+                        </m:ctrlPr>
+                      </m:sSubPr>
+                      <m:e>
+                        <m:r>
+                          <a:rPr lang="en-US" sz="2800" i="1">
+                            <a:solidFill>
+                              <a:schemeClr val="accent1"/>
+                            </a:solidFill>
+                            <a:latin typeface="Cambria Math" panose="02040503050406030204" pitchFamily="18" charset="0"/>
+                            <a:ea typeface="Cambria Math"/>
+                          </a:rPr>
+                          <m:t>𝐾</m:t>
+                        </m:r>
+                      </m:e>
+                      <m:sub>
+                        <m:r>
+                          <a:rPr lang="en-US" sz="2800" i="1">
+                            <a:solidFill>
+                              <a:schemeClr val="accent1"/>
+                            </a:solidFill>
+                            <a:latin typeface="Cambria Math" panose="02040503050406030204" pitchFamily="18" charset="0"/>
+                            <a:ea typeface="Cambria Math"/>
+                          </a:rPr>
+                          <m:t>𝑑</m:t>
+                        </m:r>
+                      </m:sub>
+                    </m:sSub>
+                  </m:oMath>
+                </a14:m>
                 <a:r>
                   <a:rPr lang="en-US" sz="2800" dirty="0">
                     <a:solidFill>
@@ -10033,7 +11817,7 @@
                     </a:solidFill>
                     <a:latin typeface="Aptos"/>
                   </a:rPr>
-                  <a:t>D anticipates error change</a:t>
+                  <a:t> anticipates error change</a:t>
                 </a:r>
                 <a:endParaRPr lang="en-US" sz="2800" dirty="0">
                   <a:latin typeface="Aptos"/>
@@ -10051,7 +11835,7 @@
             </p:txBody>
           </p:sp>
         </mc:Choice>
-        <mc:Fallback xmlns="">
+        <mc:Fallback>
           <p:sp>
             <p:nvSpPr>
               <p:cNvPr id="7" name="Content Placeholder 2">
@@ -10076,7 +11860,7 @@
               <a:blipFill>
                 <a:blip r:embed="rId3"/>
                 <a:stretch>
-                  <a:fillRect l="-1043"/>
+                  <a:fillRect/>
                 </a:stretch>
               </a:blipFill>
             </p:spPr>
@@ -10210,7 +11994,7 @@
               </a:rPr>
               <a:t> You notice your speed (e.g., 60 mph) is lower than your desired speed (e.g., 80 mph).</a:t>
             </a:r>
-            <a:endParaRPr lang="en-US" sz="2800">
+            <a:endParaRPr lang="en-US" sz="2800" dirty="0">
               <a:cs typeface="Arial"/>
             </a:endParaRPr>
           </a:p>
@@ -10233,7 +12017,7 @@
               </a:rPr>
               <a:t> The larger the speed difference (error), the harder you press the gas pedal.</a:t>
             </a:r>
-            <a:endParaRPr lang="en-US" sz="2800">
+            <a:endParaRPr lang="en-US" sz="2800" dirty="0">
               <a:cs typeface="Arial"/>
             </a:endParaRPr>
           </a:p>
@@ -10256,7 +12040,7 @@
               </a:rPr>
               <a:t> You quickly accelerate to reduce that gap.</a:t>
             </a:r>
-            <a:endParaRPr lang="en-US" sz="2800">
+            <a:endParaRPr lang="en-US" sz="2800" dirty="0">
               <a:cs typeface="Arial"/>
             </a:endParaRPr>
           </a:p>
@@ -10432,7 +12216,7 @@
                 <a:ea typeface="+mn-lt"/>
                 <a:cs typeface="+mn-lt"/>
               </a:rPr>
-              <a:t>2. I - Integral (The Past Error)</a:t>
+              <a:t>I - Integral (The Past Error)</a:t>
             </a:r>
             <a:endParaRPr lang="en-US" sz="3200" i="1" dirty="0">
               <a:solidFill>
@@ -10675,7 +12459,7 @@
                 <a:ea typeface="+mn-lt"/>
                 <a:cs typeface="+mn-lt"/>
               </a:rPr>
-              <a:t>3. D - Derivative (The Future Error/Change)</a:t>
+              <a:t>D - Derivative (The Future Error/Change)</a:t>
             </a:r>
             <a:endParaRPr lang="en-US" dirty="0">
               <a:solidFill>
@@ -10703,7 +12487,7 @@
               </a:rPr>
               <a:t> You notice your speed is approaching 80 mph very quickly.</a:t>
             </a:r>
-            <a:endParaRPr lang="en-US" sz="2800">
+            <a:endParaRPr lang="en-US" sz="2800" dirty="0">
               <a:cs typeface="Arial"/>
             </a:endParaRPr>
           </a:p>
@@ -10740,7 +12524,7 @@
               </a:rPr>
               <a:t> you reach 80 mph to prevent overshooting the speed.</a:t>
             </a:r>
-            <a:endParaRPr lang="en-US" sz="2800">
+            <a:endParaRPr lang="en-US" sz="2800" dirty="0">
               <a:cs typeface="Arial"/>
             </a:endParaRPr>
           </a:p>
@@ -10777,7 +12561,7 @@
               </a:rPr>
               <a:t> (acceleration) to stabilize the speed smoothly, rather than waiting for the speed to already be too high.</a:t>
             </a:r>
-            <a:endParaRPr lang="en-US" sz="2800">
+            <a:endParaRPr lang="en-US" sz="2800" dirty="0">
               <a:cs typeface="Arial"/>
             </a:endParaRPr>
           </a:p>
@@ -10988,8 +12772,8 @@
           </a:p>
         </p:txBody>
       </p:sp>
-      <mc:AlternateContent xmlns:mc="http://schemas.openxmlformats.org/markup-compatibility/2006" xmlns:a14="http://schemas.microsoft.com/office/drawing/2010/main">
-        <mc:Choice Requires="a14">
+      <mc:AlternateContent xmlns:mc="http://schemas.openxmlformats.org/markup-compatibility/2006">
+        <mc:Choice xmlns:a14="http://schemas.microsoft.com/office/drawing/2010/main" Requires="a14">
           <p:sp>
             <p:nvSpPr>
               <p:cNvPr id="7" name="Content Placeholder 2">
@@ -11048,7 +12832,7 @@
                         <m:ctrlPr>
                           <a:rPr lang="en-US" sz="2800" b="0" i="1" smtClean="0">
                             <a:solidFill>
-                              <a:srgbClr val="282828"/>
+                              <a:schemeClr val="accent2"/>
                             </a:solidFill>
                             <a:latin typeface="Cambria Math" panose="02040503050406030204" pitchFamily="18" charset="0"/>
                             <a:ea typeface="Cambria Math"/>
@@ -11059,7 +12843,7 @@
                         <m:r>
                           <a:rPr lang="en-US" sz="2800" b="0" i="1" smtClean="0">
                             <a:solidFill>
-                              <a:srgbClr val="282828"/>
+                              <a:schemeClr val="accent2"/>
                             </a:solidFill>
                             <a:latin typeface="Cambria Math" panose="02040503050406030204" pitchFamily="18" charset="0"/>
                             <a:ea typeface="Cambria Math"/>
@@ -11071,7 +12855,7 @@
                         <m:r>
                           <a:rPr lang="en-US" sz="2800" b="0" i="1" smtClean="0">
                             <a:solidFill>
-                              <a:srgbClr val="282828"/>
+                              <a:schemeClr val="accent2"/>
                             </a:solidFill>
                             <a:latin typeface="Cambria Math" panose="02040503050406030204" pitchFamily="18" charset="0"/>
                             <a:ea typeface="Cambria Math"/>
@@ -11085,12 +12869,22 @@
                 <a:r>
                   <a:rPr lang="en-US" sz="2800" dirty="0">
                     <a:solidFill>
+                      <a:schemeClr val="accent2"/>
+                    </a:solidFill>
+                    <a:latin typeface="Aptos"/>
+                    <a:ea typeface="Cambria Math"/>
+                  </a:rPr>
+                  <a:t> </a:t>
+                </a:r>
+                <a:r>
+                  <a:rPr lang="en-US" sz="2800" dirty="0">
+                    <a:solidFill>
                       <a:srgbClr val="282828"/>
                     </a:solidFill>
                     <a:latin typeface="Aptos"/>
                     <a:ea typeface="Cambria Math"/>
                   </a:rPr>
-                  <a:t> = 0 and </a:t>
+                  <a:t>= 0 and </a:t>
                 </a:r>
                 <a:r>
                   <a:rPr lang="en-US" sz="2800" dirty="0">
@@ -11106,9 +12900,9 @@
                     <m:sSub>
                       <m:sSubPr>
                         <m:ctrlPr>
-                          <a:rPr lang="en-US" sz="2800" i="1">
+                          <a:rPr lang="en-US" sz="2800" i="1" smtClean="0">
                             <a:solidFill>
-                              <a:srgbClr val="282828"/>
+                              <a:schemeClr val="accent1"/>
                             </a:solidFill>
                             <a:latin typeface="Cambria Math" panose="02040503050406030204" pitchFamily="18" charset="0"/>
                             <a:ea typeface="Cambria Math"/>
@@ -11119,7 +12913,7 @@
                         <m:r>
                           <a:rPr lang="en-US" sz="2800" i="1">
                             <a:solidFill>
-                              <a:srgbClr val="282828"/>
+                              <a:schemeClr val="accent1"/>
                             </a:solidFill>
                             <a:latin typeface="Cambria Math" panose="02040503050406030204" pitchFamily="18" charset="0"/>
                             <a:ea typeface="Cambria Math"/>
@@ -11131,7 +12925,7 @@
                         <m:r>
                           <a:rPr lang="en-US" sz="2800" b="0" i="1" smtClean="0">
                             <a:solidFill>
-                              <a:srgbClr val="282828"/>
+                              <a:schemeClr val="accent1"/>
                             </a:solidFill>
                             <a:latin typeface="Cambria Math" panose="02040503050406030204" pitchFamily="18" charset="0"/>
                             <a:ea typeface="Cambria Math"/>
@@ -11145,12 +12939,22 @@
                 <a:r>
                   <a:rPr lang="en-US" sz="2800" dirty="0">
                     <a:solidFill>
+                      <a:schemeClr val="accent1"/>
+                    </a:solidFill>
+                    <a:latin typeface="Aptos"/>
+                    <a:ea typeface="Cambria Math"/>
+                  </a:rPr>
+                  <a:t> </a:t>
+                </a:r>
+                <a:r>
+                  <a:rPr lang="en-US" sz="2800" dirty="0">
+                    <a:solidFill>
                       <a:srgbClr val="282828"/>
                     </a:solidFill>
                     <a:latin typeface="Aptos"/>
                     <a:ea typeface="Cambria Math"/>
                   </a:rPr>
-                  <a:t> = 0</a:t>
+                  <a:t>= 0</a:t>
                 </a:r>
               </a:p>
               <a:p>
@@ -11182,9 +12986,9 @@
                     <m:sSub>
                       <m:sSubPr>
                         <m:ctrlPr>
-                          <a:rPr lang="en-US" sz="2800" i="1">
+                          <a:rPr lang="en-US" sz="2800" i="1" smtClean="0">
                             <a:solidFill>
-                              <a:srgbClr val="282828"/>
+                              <a:srgbClr val="92D050"/>
                             </a:solidFill>
                             <a:latin typeface="Cambria Math" panose="02040503050406030204" pitchFamily="18" charset="0"/>
                             <a:ea typeface="Cambria Math"/>
@@ -11195,7 +12999,7 @@
                         <m:r>
                           <a:rPr lang="en-US" sz="2800" i="1">
                             <a:solidFill>
-                              <a:srgbClr val="282828"/>
+                              <a:srgbClr val="92D050"/>
                             </a:solidFill>
                             <a:latin typeface="Cambria Math" panose="02040503050406030204" pitchFamily="18" charset="0"/>
                             <a:ea typeface="Cambria Math"/>
@@ -11207,7 +13011,7 @@
                         <m:r>
                           <a:rPr lang="en-US" sz="2800" i="1">
                             <a:solidFill>
-                              <a:srgbClr val="282828"/>
+                              <a:srgbClr val="92D050"/>
                             </a:solidFill>
                             <a:latin typeface="Cambria Math" panose="02040503050406030204" pitchFamily="18" charset="0"/>
                             <a:ea typeface="Cambria Math"/>
@@ -11221,12 +13025,22 @@
                 <a:r>
                   <a:rPr lang="en-US" sz="2800" dirty="0">
                     <a:solidFill>
+                      <a:srgbClr val="92D050"/>
+                    </a:solidFill>
+                    <a:latin typeface="Aptos"/>
+                    <a:ea typeface="Cambria Math"/>
+                  </a:rPr>
+                  <a:t> </a:t>
+                </a:r>
+                <a:r>
+                  <a:rPr lang="en-US" sz="2800" dirty="0">
+                    <a:solidFill>
                       <a:srgbClr val="282828"/>
                     </a:solidFill>
                     <a:latin typeface="Aptos"/>
                     <a:ea typeface="Cambria Math"/>
                   </a:rPr>
-                  <a:t> to get a responsive </a:t>
+                  <a:t>to get a responsive </a:t>
                 </a:r>
                 <a:r>
                   <a:rPr lang="en-US" sz="2800" dirty="0">
@@ -11266,9 +13080,9 @@
                     <m:sSub>
                       <m:sSubPr>
                         <m:ctrlPr>
-                          <a:rPr lang="en-US" sz="2800" i="1">
+                          <a:rPr lang="en-US" sz="2800" i="1" smtClean="0">
                             <a:solidFill>
-                              <a:srgbClr val="282828"/>
+                              <a:schemeClr val="accent3"/>
                             </a:solidFill>
                             <a:latin typeface="Cambria Math" panose="02040503050406030204" pitchFamily="18" charset="0"/>
                             <a:ea typeface="Cambria Math"/>
@@ -11279,7 +13093,7 @@
                         <m:r>
                           <a:rPr lang="en-US" sz="2800" i="1">
                             <a:solidFill>
-                              <a:srgbClr val="282828"/>
+                              <a:schemeClr val="accent3"/>
                             </a:solidFill>
                             <a:latin typeface="Cambria Math" panose="02040503050406030204" pitchFamily="18" charset="0"/>
                             <a:ea typeface="Cambria Math"/>
@@ -11291,7 +13105,7 @@
                         <m:r>
                           <a:rPr lang="en-US" sz="2800" b="0" i="1" smtClean="0">
                             <a:solidFill>
-                              <a:srgbClr val="282828"/>
+                              <a:schemeClr val="accent3"/>
                             </a:solidFill>
                             <a:latin typeface="Cambria Math" panose="02040503050406030204" pitchFamily="18" charset="0"/>
                             <a:ea typeface="Cambria Math"/>
@@ -11350,9 +13164,9 @@
                     <m:sSub>
                       <m:sSubPr>
                         <m:ctrlPr>
-                          <a:rPr lang="en-US" sz="2800" i="1">
+                          <a:rPr lang="en-US" sz="2800" i="1" smtClean="0">
                             <a:solidFill>
-                              <a:srgbClr val="282828"/>
+                              <a:schemeClr val="accent1"/>
                             </a:solidFill>
                             <a:latin typeface="Cambria Math" panose="02040503050406030204" pitchFamily="18" charset="0"/>
                             <a:ea typeface="Cambria Math"/>
@@ -11363,7 +13177,7 @@
                         <m:r>
                           <a:rPr lang="en-US" sz="2800" i="1">
                             <a:solidFill>
-                              <a:srgbClr val="282828"/>
+                              <a:schemeClr val="accent1"/>
                             </a:solidFill>
                             <a:latin typeface="Cambria Math" panose="02040503050406030204" pitchFamily="18" charset="0"/>
                             <a:ea typeface="Cambria Math"/>
@@ -11375,7 +13189,7 @@
                         <m:r>
                           <a:rPr lang="en-US" sz="2800" b="0" i="1" smtClean="0">
                             <a:solidFill>
-                              <a:srgbClr val="282828"/>
+                              <a:schemeClr val="accent1"/>
                             </a:solidFill>
                             <a:latin typeface="Cambria Math" panose="02040503050406030204" pitchFamily="18" charset="0"/>
                             <a:ea typeface="Cambria Math"/>
@@ -11389,7 +13203,7 @@
                 <a:r>
                   <a:rPr lang="en-US" sz="2800" dirty="0">
                     <a:solidFill>
-                      <a:srgbClr val="282828"/>
+                      <a:schemeClr val="accent1"/>
                     </a:solidFill>
                     <a:latin typeface="Aptos"/>
                     <a:ea typeface="Cambria Math"/>
@@ -11409,7 +13223,7 @@
             </p:txBody>
           </p:sp>
         </mc:Choice>
-        <mc:Fallback xmlns="">
+        <mc:Fallback>
           <p:sp>
             <p:nvSpPr>
               <p:cNvPr id="7" name="Content Placeholder 2">
@@ -11617,10 +13431,13 @@
               <a:t>Problems with </a:t>
             </a:r>
             <a:r>
-              <a:rPr lang="en-US" sz="4000" dirty="0" err="1">
+              <a:rPr lang="en-US" sz="4000" dirty="0">
+                <a:solidFill>
+                  <a:schemeClr val="accent1"/>
+                </a:solidFill>
                 <a:cs typeface="Arial"/>
               </a:rPr>
-              <a:t>K_d</a:t>
+              <a:t>D</a:t>
             </a:r>
           </a:p>
         </p:txBody>
@@ -12811,6 +14628,21 @@
 </file>
 
 <file path=customXml/item1.xml><?xml version="1.0" encoding="utf-8"?>
+<p:properties xmlns:p="http://schemas.microsoft.com/office/2006/metadata/properties" xmlns:xsi="http://www.w3.org/2001/XMLSchema-instance" xmlns:pc="http://schemas.microsoft.com/office/infopath/2007/PartnerControls">
+  <documentManagement/>
+</p:properties>
+</file>
+
+<file path=customXml/item2.xml><?xml version="1.0" encoding="utf-8"?>
+<?mso-contentType ?>
+<FormTemplates xmlns="http://schemas.microsoft.com/sharepoint/v3/contenttype/forms">
+  <Display>DocumentLibraryForm</Display>
+  <Edit>DocumentLibraryForm</Edit>
+  <New>DocumentLibraryForm</New>
+</FormTemplates>
+</file>
+
+<file path=customXml/item3.xml><?xml version="1.0" encoding="utf-8"?>
 <ct:contentTypeSchema xmlns:ct="http://schemas.microsoft.com/office/2006/metadata/contentType" xmlns:ma="http://schemas.microsoft.com/office/2006/metadata/properties/metaAttributes" ct:_="" ma:_="" ma:contentTypeName="Document" ma:contentTypeID="0x01010032ABE38BA518424A98DE136B5A4D5BBB" ma:contentTypeVersion="7" ma:contentTypeDescription="Create a new document." ma:contentTypeScope="" ma:versionID="6f6ef3b06f4ecb0588acd0e670c58b9e">
   <xsd:schema xmlns:xsd="http://www.w3.org/2001/XMLSchema" xmlns:xs="http://www.w3.org/2001/XMLSchema" xmlns:p="http://schemas.microsoft.com/office/2006/metadata/properties" xmlns:ns3="6ad28483-17e6-41fb-bc0e-a9a93afcd187" xmlns:ns4="9aa7709c-b3df-41fe-a9d8-dd94c9a11819" targetNamespace="http://schemas.microsoft.com/office/2006/metadata/properties" ma:root="true" ma:fieldsID="c9739085591d71e0d5540cf91b7e38ee" ns3:_="" ns4:_="">
     <xsd:import namespace="6ad28483-17e6-41fb-bc0e-a9a93afcd187"/>
@@ -12995,22 +14827,32 @@
 </ct:contentTypeSchema>
 </file>
 
-<file path=customXml/item2.xml><?xml version="1.0" encoding="utf-8"?>
-<p:properties xmlns:p="http://schemas.microsoft.com/office/2006/metadata/properties" xmlns:xsi="http://www.w3.org/2001/XMLSchema-instance" xmlns:pc="http://schemas.microsoft.com/office/infopath/2007/PartnerControls">
-  <documentManagement/>
-</p:properties>
+<file path=customXml/itemProps1.xml><?xml version="1.0" encoding="utf-8"?>
+<ds:datastoreItem xmlns:ds="http://schemas.openxmlformats.org/officeDocument/2006/customXml" ds:itemID="{D9406880-3DFF-4A78-B374-1310A739C756}">
+  <ds:schemaRefs>
+    <ds:schemaRef ds:uri="http://schemas.microsoft.com/office/2006/documentManagement/types"/>
+    <ds:schemaRef ds:uri="http://purl.org/dc/terms/"/>
+    <ds:schemaRef ds:uri="http://schemas.microsoft.com/office/2006/metadata/properties"/>
+    <ds:schemaRef ds:uri="9aa7709c-b3df-41fe-a9d8-dd94c9a11819"/>
+    <ds:schemaRef ds:uri="http://purl.org/dc/dcmitype/"/>
+    <ds:schemaRef ds:uri="http://schemas.microsoft.com/office/infopath/2007/PartnerControls"/>
+    <ds:schemaRef ds:uri="http://purl.org/dc/elements/1.1/"/>
+    <ds:schemaRef ds:uri="http://schemas.openxmlformats.org/package/2006/metadata/core-properties"/>
+    <ds:schemaRef ds:uri="6ad28483-17e6-41fb-bc0e-a9a93afcd187"/>
+    <ds:schemaRef ds:uri="http://www.w3.org/XML/1998/namespace"/>
+  </ds:schemaRefs>
+</ds:datastoreItem>
 </file>
 
-<file path=customXml/item3.xml><?xml version="1.0" encoding="utf-8"?>
-<?mso-contentType ?>
-<FormTemplates xmlns="http://schemas.microsoft.com/sharepoint/v3/contenttype/forms">
-  <Display>DocumentLibraryForm</Display>
-  <Edit>DocumentLibraryForm</Edit>
-  <New>DocumentLibraryForm</New>
-</FormTemplates>
+<file path=customXml/itemProps2.xml><?xml version="1.0" encoding="utf-8"?>
+<ds:datastoreItem xmlns:ds="http://schemas.openxmlformats.org/officeDocument/2006/customXml" ds:itemID="{6FDC3E2B-2B95-4DEE-BED9-0388B258D0F5}">
+  <ds:schemaRefs>
+    <ds:schemaRef ds:uri="http://schemas.microsoft.com/sharepoint/v3/contenttype/forms"/>
+  </ds:schemaRefs>
+</ds:datastoreItem>
 </file>
 
-<file path=customXml/itemProps1.xml><?xml version="1.0" encoding="utf-8"?>
+<file path=customXml/itemProps3.xml><?xml version="1.0" encoding="utf-8"?>
 <ds:datastoreItem xmlns:ds="http://schemas.openxmlformats.org/officeDocument/2006/customXml" ds:itemID="{FF48F90B-EE2D-4724-8C13-C4F0A4EB41ED}">
   <ds:schemaRefs>
     <ds:schemaRef ds:uri="http://schemas.microsoft.com/office/2006/metadata/contentType"/>
@@ -13027,29 +14869,4 @@
     <ds:schemaRef ds:uri="http://schemas.microsoft.com/internal/obd"/>
   </ds:schemaRefs>
 </ds:datastoreItem>
-</file>
-
-<file path=customXml/itemProps2.xml><?xml version="1.0" encoding="utf-8"?>
-<ds:datastoreItem xmlns:ds="http://schemas.openxmlformats.org/officeDocument/2006/customXml" ds:itemID="{D9406880-3DFF-4A78-B374-1310A739C756}">
-  <ds:schemaRefs>
-    <ds:schemaRef ds:uri="http://schemas.microsoft.com/office/2006/documentManagement/types"/>
-    <ds:schemaRef ds:uri="http://purl.org/dc/terms/"/>
-    <ds:schemaRef ds:uri="http://schemas.microsoft.com/office/2006/metadata/properties"/>
-    <ds:schemaRef ds:uri="9aa7709c-b3df-41fe-a9d8-dd94c9a11819"/>
-    <ds:schemaRef ds:uri="http://purl.org/dc/dcmitype/"/>
-    <ds:schemaRef ds:uri="http://schemas.microsoft.com/office/infopath/2007/PartnerControls"/>
-    <ds:schemaRef ds:uri="http://purl.org/dc/elements/1.1/"/>
-    <ds:schemaRef ds:uri="http://schemas.openxmlformats.org/package/2006/metadata/core-properties"/>
-    <ds:schemaRef ds:uri="6ad28483-17e6-41fb-bc0e-a9a93afcd187"/>
-    <ds:schemaRef ds:uri="http://www.w3.org/XML/1998/namespace"/>
-  </ds:schemaRefs>
-</ds:datastoreItem>
-</file>
-
-<file path=customXml/itemProps3.xml><?xml version="1.0" encoding="utf-8"?>
-<ds:datastoreItem xmlns:ds="http://schemas.openxmlformats.org/officeDocument/2006/customXml" ds:itemID="{6FDC3E2B-2B95-4DEE-BED9-0388B258D0F5}">
-  <ds:schemaRefs>
-    <ds:schemaRef ds:uri="http://schemas.microsoft.com/sharepoint/v3/contenttype/forms"/>
-  </ds:schemaRefs>
-</ds:datastoreItem>
 </file>
--- a/PID_Workshop_V1.pptx
+++ b/PID_Workshop_V1.pptx
@@ -9229,8 +9229,8 @@
         </p:nvSpPr>
         <p:spPr>
           <a:xfrm>
-            <a:off x="4036594" y="5254290"/>
-            <a:ext cx="7800473" cy="688306"/>
+            <a:off x="5227608" y="5254290"/>
+            <a:ext cx="6609459" cy="688306"/>
           </a:xfrm>
           <a:prstGeom prst="rect">
             <a:avLst/>
@@ -9264,30 +9264,22 @@
           <a:p>
             <a:pPr algn="ctr"/>
             <a:r>
-              <a:rPr lang="en-US" sz="1800" b="1" baseline="0">
+              <a:rPr lang="en-US" sz="1800" b="1" baseline="0" dirty="0">
                 <a:latin typeface="Arial"/>
               </a:rPr>
               <a:t>Link: </a:t>
             </a:r>
             <a:r>
-              <a:rPr lang="en-US" sz="1800" b="1" u="sng" strike="noStrike" baseline="0">
+              <a:rPr lang="en-US" b="1" u="sng" dirty="0">
                 <a:solidFill>
                   <a:srgbClr val="181717"/>
                 </a:solidFill>
-                <a:latin typeface="Arial"/>
                 <a:ea typeface="Segoe UI"/>
                 <a:cs typeface="Segoe UI"/>
-                <a:hlinkClick r:id="rId3">
-                  <a:extLst>
-                    <a:ext uri="{A12FA001-AC4F-418D-AE19-62706E023703}">
-                      <ahyp:hlinkClr xmlns:ahyp="http://schemas.microsoft.com/office/drawing/2018/hyperlinkcolor" val="tx"/>
-                    </a:ext>
-                  </a:extLst>
-                </a:hlinkClick>
               </a:rPr>
-              <a:t>https://github.com/jonaswagner2826/DSC_SysID_Workshop</a:t>
-            </a:r>
-            <a:endParaRPr lang="en-US"/>
+              <a:t>https://github.com/m-usama-z/cssc-pid-workshop</a:t>
+            </a:r>
+            <a:endParaRPr lang="en-US" dirty="0"/>
           </a:p>
         </p:txBody>
       </p:sp>
@@ -11048,8 +11040,8 @@
           </a:p>
         </p:txBody>
       </p:sp>
-      <mc:AlternateContent xmlns:mc="http://schemas.openxmlformats.org/markup-compatibility/2006">
-        <mc:Choice xmlns:a14="http://schemas.microsoft.com/office/drawing/2010/main" Requires="a14">
+      <mc:AlternateContent xmlns:mc="http://schemas.openxmlformats.org/markup-compatibility/2006" xmlns:a14="http://schemas.microsoft.com/office/drawing/2010/main">
+        <mc:Choice Requires="a14">
           <p:sp>
             <p:nvSpPr>
               <p:cNvPr id="7" name="Content Placeholder 2">
@@ -11835,7 +11827,7 @@
             </p:txBody>
           </p:sp>
         </mc:Choice>
-        <mc:Fallback>
+        <mc:Fallback xmlns="">
           <p:sp>
             <p:nvSpPr>
               <p:cNvPr id="7" name="Content Placeholder 2">
@@ -12772,8 +12764,8 @@
           </a:p>
         </p:txBody>
       </p:sp>
-      <mc:AlternateContent xmlns:mc="http://schemas.openxmlformats.org/markup-compatibility/2006">
-        <mc:Choice xmlns:a14="http://schemas.microsoft.com/office/drawing/2010/main" Requires="a14">
+      <mc:AlternateContent xmlns:mc="http://schemas.openxmlformats.org/markup-compatibility/2006" xmlns:a14="http://schemas.microsoft.com/office/drawing/2010/main">
+        <mc:Choice Requires="a14">
           <p:sp>
             <p:nvSpPr>
               <p:cNvPr id="7" name="Content Placeholder 2">
@@ -13223,7 +13215,7 @@
             </p:txBody>
           </p:sp>
         </mc:Choice>
-        <mc:Fallback>
+        <mc:Fallback xmlns="">
           <p:sp>
             <p:nvSpPr>
               <p:cNvPr id="7" name="Content Placeholder 2">
@@ -14634,15 +14626,6 @@
 </file>
 
 <file path=customXml/item2.xml><?xml version="1.0" encoding="utf-8"?>
-<?mso-contentType ?>
-<FormTemplates xmlns="http://schemas.microsoft.com/sharepoint/v3/contenttype/forms">
-  <Display>DocumentLibraryForm</Display>
-  <Edit>DocumentLibraryForm</Edit>
-  <New>DocumentLibraryForm</New>
-</FormTemplates>
-</file>
-
-<file path=customXml/item3.xml><?xml version="1.0" encoding="utf-8"?>
 <ct:contentTypeSchema xmlns:ct="http://schemas.microsoft.com/office/2006/metadata/contentType" xmlns:ma="http://schemas.microsoft.com/office/2006/metadata/properties/metaAttributes" ct:_="" ma:_="" ma:contentTypeName="Document" ma:contentTypeID="0x01010032ABE38BA518424A98DE136B5A4D5BBB" ma:contentTypeVersion="7" ma:contentTypeDescription="Create a new document." ma:contentTypeScope="" ma:versionID="6f6ef3b06f4ecb0588acd0e670c58b9e">
   <xsd:schema xmlns:xsd="http://www.w3.org/2001/XMLSchema" xmlns:xs="http://www.w3.org/2001/XMLSchema" xmlns:p="http://schemas.microsoft.com/office/2006/metadata/properties" xmlns:ns3="6ad28483-17e6-41fb-bc0e-a9a93afcd187" xmlns:ns4="9aa7709c-b3df-41fe-a9d8-dd94c9a11819" targetNamespace="http://schemas.microsoft.com/office/2006/metadata/properties" ma:root="true" ma:fieldsID="c9739085591d71e0d5540cf91b7e38ee" ns3:_="" ns4:_="">
     <xsd:import namespace="6ad28483-17e6-41fb-bc0e-a9a93afcd187"/>
@@ -14827,6 +14810,15 @@
 </ct:contentTypeSchema>
 </file>
 
+<file path=customXml/item3.xml><?xml version="1.0" encoding="utf-8"?>
+<?mso-contentType ?>
+<FormTemplates xmlns="http://schemas.microsoft.com/sharepoint/v3/contenttype/forms">
+  <Display>DocumentLibraryForm</Display>
+  <Edit>DocumentLibraryForm</Edit>
+  <New>DocumentLibraryForm</New>
+</FormTemplates>
+</file>
+
 <file path=customXml/itemProps1.xml><?xml version="1.0" encoding="utf-8"?>
 <ds:datastoreItem xmlns:ds="http://schemas.openxmlformats.org/officeDocument/2006/customXml" ds:itemID="{D9406880-3DFF-4A78-B374-1310A739C756}">
   <ds:schemaRefs>
@@ -14845,14 +14837,6 @@
 </file>
 
 <file path=customXml/itemProps2.xml><?xml version="1.0" encoding="utf-8"?>
-<ds:datastoreItem xmlns:ds="http://schemas.openxmlformats.org/officeDocument/2006/customXml" ds:itemID="{6FDC3E2B-2B95-4DEE-BED9-0388B258D0F5}">
-  <ds:schemaRefs>
-    <ds:schemaRef ds:uri="http://schemas.microsoft.com/sharepoint/v3/contenttype/forms"/>
-  </ds:schemaRefs>
-</ds:datastoreItem>
-</file>
-
-<file path=customXml/itemProps3.xml><?xml version="1.0" encoding="utf-8"?>
 <ds:datastoreItem xmlns:ds="http://schemas.openxmlformats.org/officeDocument/2006/customXml" ds:itemID="{FF48F90B-EE2D-4724-8C13-C4F0A4EB41ED}">
   <ds:schemaRefs>
     <ds:schemaRef ds:uri="http://schemas.microsoft.com/office/2006/metadata/contentType"/>
@@ -14869,4 +14853,12 @@
     <ds:schemaRef ds:uri="http://schemas.microsoft.com/internal/obd"/>
   </ds:schemaRefs>
 </ds:datastoreItem>
+</file>
+
+<file path=customXml/itemProps3.xml><?xml version="1.0" encoding="utf-8"?>
+<ds:datastoreItem xmlns:ds="http://schemas.openxmlformats.org/officeDocument/2006/customXml" ds:itemID="{6FDC3E2B-2B95-4DEE-BED9-0388B258D0F5}">
+  <ds:schemaRefs>
+    <ds:schemaRef ds:uri="http://schemas.microsoft.com/sharepoint/v3/contenttype/forms"/>
+  </ds:schemaRefs>
+</ds:datastoreItem>
 </file>